--- a/Lez6.pptx
+++ b/Lez6.pptx
@@ -23,6 +23,11 @@
     <p:sldId id="264" r:id="rId17"/>
     <p:sldId id="265" r:id="rId18"/>
     <p:sldId id="266" r:id="rId19"/>
+    <p:sldId id="275" r:id="rId20"/>
+    <p:sldId id="276" r:id="rId21"/>
+    <p:sldId id="277" r:id="rId22"/>
+    <p:sldId id="278" r:id="rId23"/>
+    <p:sldId id="279" r:id="rId24"/>
   </p:sldIdLst>
   <p:sldSz cx="12192000" cy="6858000"/>
   <p:notesSz cx="6858000" cy="9144000"/>
@@ -134,7 +139,7 @@
   <pc:docChgLst>
     <pc:chgData name="Alessandro Di Piazza" userId="242384fd-1746-4b70-8d90-c83f4330e5ed" providerId="ADAL" clId="{FFF1DA74-BEAE-470B-8D8A-B7A1F3E1BF85}"/>
     <pc:docChg chg="undo custSel addSld delSld modSld sldOrd">
-      <pc:chgData name="Alessandro Di Piazza" userId="242384fd-1746-4b70-8d90-c83f4330e5ed" providerId="ADAL" clId="{FFF1DA74-BEAE-470B-8D8A-B7A1F3E1BF85}" dt="2026-05-27T12:22:53.997" v="2396" actId="20577"/>
+      <pc:chgData name="Alessandro Di Piazza" userId="242384fd-1746-4b70-8d90-c83f4330e5ed" providerId="ADAL" clId="{FFF1DA74-BEAE-470B-8D8A-B7A1F3E1BF85}" dt="2026-05-27T13:00:48.091" v="2504" actId="20577"/>
       <pc:docMkLst>
         <pc:docMk/>
       </pc:docMkLst>
@@ -468,7 +473,7 @@
         </pc:sldMkLst>
       </pc:sldChg>
       <pc:sldChg chg="addSp modSp new mod">
-        <pc:chgData name="Alessandro Di Piazza" userId="242384fd-1746-4b70-8d90-c83f4330e5ed" providerId="ADAL" clId="{FFF1DA74-BEAE-470B-8D8A-B7A1F3E1BF85}" dt="2026-05-27T11:19:26.760" v="2347" actId="2711"/>
+        <pc:chgData name="Alessandro Di Piazza" userId="242384fd-1746-4b70-8d90-c83f4330e5ed" providerId="ADAL" clId="{FFF1DA74-BEAE-470B-8D8A-B7A1F3E1BF85}" dt="2026-05-27T12:47:55.608" v="2417" actId="6549"/>
         <pc:sldMkLst>
           <pc:docMk/>
           <pc:sldMk cId="781585204" sldId="266"/>
@@ -482,7 +487,7 @@
           </ac:spMkLst>
         </pc:spChg>
         <pc:spChg chg="mod">
-          <ac:chgData name="Alessandro Di Piazza" userId="242384fd-1746-4b70-8d90-c83f4330e5ed" providerId="ADAL" clId="{FFF1DA74-BEAE-470B-8D8A-B7A1F3E1BF85}" dt="2026-05-27T11:19:26.760" v="2347" actId="2711"/>
+          <ac:chgData name="Alessandro Di Piazza" userId="242384fd-1746-4b70-8d90-c83f4330e5ed" providerId="ADAL" clId="{FFF1DA74-BEAE-470B-8D8A-B7A1F3E1BF85}" dt="2026-05-27T12:47:55.608" v="2417" actId="6549"/>
           <ac:spMkLst>
             <pc:docMk/>
             <pc:sldMk cId="781585204" sldId="266"/>
@@ -490,7 +495,7 @@
           </ac:spMkLst>
         </pc:spChg>
         <pc:picChg chg="add mod">
-          <ac:chgData name="Alessandro Di Piazza" userId="242384fd-1746-4b70-8d90-c83f4330e5ed" providerId="ADAL" clId="{FFF1DA74-BEAE-470B-8D8A-B7A1F3E1BF85}" dt="2026-05-27T09:49:36.532" v="1801" actId="1076"/>
+          <ac:chgData name="Alessandro Di Piazza" userId="242384fd-1746-4b70-8d90-c83f4330e5ed" providerId="ADAL" clId="{FFF1DA74-BEAE-470B-8D8A-B7A1F3E1BF85}" dt="2026-05-27T12:47:42.893" v="2403" actId="1076"/>
           <ac:picMkLst>
             <pc:docMk/>
             <pc:sldMk cId="781585204" sldId="266"/>
@@ -818,6 +823,161 @@
           </ac:picMkLst>
         </pc:picChg>
       </pc:sldChg>
+      <pc:sldChg chg="addSp delSp modSp new mod">
+        <pc:chgData name="Alessandro Di Piazza" userId="242384fd-1746-4b70-8d90-c83f4330e5ed" providerId="ADAL" clId="{FFF1DA74-BEAE-470B-8D8A-B7A1F3E1BF85}" dt="2026-05-27T12:50:09.333" v="2445" actId="1076"/>
+        <pc:sldMkLst>
+          <pc:docMk/>
+          <pc:sldMk cId="3664682121" sldId="275"/>
+        </pc:sldMkLst>
+        <pc:spChg chg="mod">
+          <ac:chgData name="Alessandro Di Piazza" userId="242384fd-1746-4b70-8d90-c83f4330e5ed" providerId="ADAL" clId="{FFF1DA74-BEAE-470B-8D8A-B7A1F3E1BF85}" dt="2026-05-27T12:48:58.447" v="2423" actId="113"/>
+          <ac:spMkLst>
+            <pc:docMk/>
+            <pc:sldMk cId="3664682121" sldId="275"/>
+            <ac:spMk id="2" creationId="{D05ACDF2-FA74-5FF8-E0A3-484C44089926}"/>
+          </ac:spMkLst>
+        </pc:spChg>
+        <pc:spChg chg="mod">
+          <ac:chgData name="Alessandro Di Piazza" userId="242384fd-1746-4b70-8d90-c83f4330e5ed" providerId="ADAL" clId="{FFF1DA74-BEAE-470B-8D8A-B7A1F3E1BF85}" dt="2026-05-27T12:49:16.923" v="2437" actId="5793"/>
+          <ac:spMkLst>
+            <pc:docMk/>
+            <pc:sldMk cId="3664682121" sldId="275"/>
+            <ac:spMk id="3" creationId="{17AE8612-A405-5581-58B7-0F767C660828}"/>
+          </ac:spMkLst>
+        </pc:spChg>
+        <pc:picChg chg="add del mod">
+          <ac:chgData name="Alessandro Di Piazza" userId="242384fd-1746-4b70-8d90-c83f4330e5ed" providerId="ADAL" clId="{FFF1DA74-BEAE-470B-8D8A-B7A1F3E1BF85}" dt="2026-05-27T12:49:57.661" v="2442" actId="478"/>
+          <ac:picMkLst>
+            <pc:docMk/>
+            <pc:sldMk cId="3664682121" sldId="275"/>
+            <ac:picMk id="2050" creationId="{67FF4FDC-363F-01FF-3EC2-BD36C7B76F6C}"/>
+          </ac:picMkLst>
+        </pc:picChg>
+        <pc:picChg chg="add mod">
+          <ac:chgData name="Alessandro Di Piazza" userId="242384fd-1746-4b70-8d90-c83f4330e5ed" providerId="ADAL" clId="{FFF1DA74-BEAE-470B-8D8A-B7A1F3E1BF85}" dt="2026-05-27T12:50:09.333" v="2445" actId="1076"/>
+          <ac:picMkLst>
+            <pc:docMk/>
+            <pc:sldMk cId="3664682121" sldId="275"/>
+            <ac:picMk id="2052" creationId="{F689ADB7-1E93-06EA-80C1-53BF37ECF6D1}"/>
+          </ac:picMkLst>
+        </pc:picChg>
+      </pc:sldChg>
+      <pc:sldChg chg="modSp add mod">
+        <pc:chgData name="Alessandro Di Piazza" userId="242384fd-1746-4b70-8d90-c83f4330e5ed" providerId="ADAL" clId="{FFF1DA74-BEAE-470B-8D8A-B7A1F3E1BF85}" dt="2026-05-27T12:51:15.485" v="2456" actId="1076"/>
+        <pc:sldMkLst>
+          <pc:docMk/>
+          <pc:sldMk cId="3005548171" sldId="276"/>
+        </pc:sldMkLst>
+        <pc:spChg chg="mod">
+          <ac:chgData name="Alessandro Di Piazza" userId="242384fd-1746-4b70-8d90-c83f4330e5ed" providerId="ADAL" clId="{FFF1DA74-BEAE-470B-8D8A-B7A1F3E1BF85}" dt="2026-05-27T12:51:15.485" v="2456" actId="1076"/>
+          <ac:spMkLst>
+            <pc:docMk/>
+            <pc:sldMk cId="3005548171" sldId="276"/>
+            <ac:spMk id="3" creationId="{1BE6ABF3-7277-B9F7-DE38-C760E051C70B}"/>
+          </ac:spMkLst>
+        </pc:spChg>
+      </pc:sldChg>
+      <pc:sldChg chg="addSp modSp new mod">
+        <pc:chgData name="Alessandro Di Piazza" userId="242384fd-1746-4b70-8d90-c83f4330e5ed" providerId="ADAL" clId="{FFF1DA74-BEAE-470B-8D8A-B7A1F3E1BF85}" dt="2026-05-27T12:52:48.968" v="2470" actId="2710"/>
+        <pc:sldMkLst>
+          <pc:docMk/>
+          <pc:sldMk cId="642528440" sldId="277"/>
+        </pc:sldMkLst>
+        <pc:spChg chg="mod">
+          <ac:chgData name="Alessandro Di Piazza" userId="242384fd-1746-4b70-8d90-c83f4330e5ed" providerId="ADAL" clId="{FFF1DA74-BEAE-470B-8D8A-B7A1F3E1BF85}" dt="2026-05-27T12:52:13.718" v="2459"/>
+          <ac:spMkLst>
+            <pc:docMk/>
+            <pc:sldMk cId="642528440" sldId="277"/>
+            <ac:spMk id="2" creationId="{FFFED3E2-FACD-1DC4-BDAB-317ECAE6ABDE}"/>
+          </ac:spMkLst>
+        </pc:spChg>
+        <pc:spChg chg="mod">
+          <ac:chgData name="Alessandro Di Piazza" userId="242384fd-1746-4b70-8d90-c83f4330e5ed" providerId="ADAL" clId="{FFF1DA74-BEAE-470B-8D8A-B7A1F3E1BF85}" dt="2026-05-27T12:52:44.761" v="2469" actId="255"/>
+          <ac:spMkLst>
+            <pc:docMk/>
+            <pc:sldMk cId="642528440" sldId="277"/>
+            <ac:spMk id="3" creationId="{E835E16E-8E7A-D6A2-8F11-42EA5B125A1B}"/>
+          </ac:spMkLst>
+        </pc:spChg>
+        <pc:spChg chg="add mod">
+          <ac:chgData name="Alessandro Di Piazza" userId="242384fd-1746-4b70-8d90-c83f4330e5ed" providerId="ADAL" clId="{FFF1DA74-BEAE-470B-8D8A-B7A1F3E1BF85}" dt="2026-05-27T12:52:48.968" v="2470" actId="2710"/>
+          <ac:spMkLst>
+            <pc:docMk/>
+            <pc:sldMk cId="642528440" sldId="277"/>
+            <ac:spMk id="5" creationId="{350E9F45-3FF3-8E0B-4821-1C70DA63D422}"/>
+          </ac:spMkLst>
+        </pc:spChg>
+      </pc:sldChg>
+      <pc:sldChg chg="addSp delSp modSp new mod">
+        <pc:chgData name="Alessandro Di Piazza" userId="242384fd-1746-4b70-8d90-c83f4330e5ed" providerId="ADAL" clId="{FFF1DA74-BEAE-470B-8D8A-B7A1F3E1BF85}" dt="2026-05-27T12:57:53.824" v="2475" actId="1076"/>
+        <pc:sldMkLst>
+          <pc:docMk/>
+          <pc:sldMk cId="2708153801" sldId="278"/>
+        </pc:sldMkLst>
+        <pc:spChg chg="mod">
+          <ac:chgData name="Alessandro Di Piazza" userId="242384fd-1746-4b70-8d90-c83f4330e5ed" providerId="ADAL" clId="{FFF1DA74-BEAE-470B-8D8A-B7A1F3E1BF85}" dt="2026-05-27T12:53:09.190" v="2472"/>
+          <ac:spMkLst>
+            <pc:docMk/>
+            <pc:sldMk cId="2708153801" sldId="278"/>
+            <ac:spMk id="2" creationId="{39C55D3D-6977-DE17-1CBD-7335022F1ED9}"/>
+          </ac:spMkLst>
+        </pc:spChg>
+        <pc:spChg chg="del">
+          <ac:chgData name="Alessandro Di Piazza" userId="242384fd-1746-4b70-8d90-c83f4330e5ed" providerId="ADAL" clId="{FFF1DA74-BEAE-470B-8D8A-B7A1F3E1BF85}" dt="2026-05-27T12:57:52.262" v="2473" actId="478"/>
+          <ac:spMkLst>
+            <pc:docMk/>
+            <pc:sldMk cId="2708153801" sldId="278"/>
+            <ac:spMk id="3" creationId="{F3CBC53A-5C19-6E87-C11F-C7812EE4EAB6}"/>
+          </ac:spMkLst>
+        </pc:spChg>
+        <pc:picChg chg="add mod">
+          <ac:chgData name="Alessandro Di Piazza" userId="242384fd-1746-4b70-8d90-c83f4330e5ed" providerId="ADAL" clId="{FFF1DA74-BEAE-470B-8D8A-B7A1F3E1BF85}" dt="2026-05-27T12:57:53.824" v="2475" actId="1076"/>
+          <ac:picMkLst>
+            <pc:docMk/>
+            <pc:sldMk cId="2708153801" sldId="278"/>
+            <ac:picMk id="4" creationId="{E85D1B1F-E92D-7266-3106-5ABA8C4F40A0}"/>
+          </ac:picMkLst>
+        </pc:picChg>
+      </pc:sldChg>
+      <pc:sldChg chg="addSp delSp modSp new mod">
+        <pc:chgData name="Alessandro Di Piazza" userId="242384fd-1746-4b70-8d90-c83f4330e5ed" providerId="ADAL" clId="{FFF1DA74-BEAE-470B-8D8A-B7A1F3E1BF85}" dt="2026-05-27T13:00:48.091" v="2504" actId="20577"/>
+        <pc:sldMkLst>
+          <pc:docMk/>
+          <pc:sldMk cId="1237004907" sldId="279"/>
+        </pc:sldMkLst>
+        <pc:spChg chg="mod">
+          <ac:chgData name="Alessandro Di Piazza" userId="242384fd-1746-4b70-8d90-c83f4330e5ed" providerId="ADAL" clId="{FFF1DA74-BEAE-470B-8D8A-B7A1F3E1BF85}" dt="2026-05-27T12:57:58.581" v="2482" actId="20577"/>
+          <ac:spMkLst>
+            <pc:docMk/>
+            <pc:sldMk cId="1237004907" sldId="279"/>
+            <ac:spMk id="2" creationId="{31DB3AD2-6E69-AE17-914D-6C2AA9E62348}"/>
+          </ac:spMkLst>
+        </pc:spChg>
+        <pc:spChg chg="mod">
+          <ac:chgData name="Alessandro Di Piazza" userId="242384fd-1746-4b70-8d90-c83f4330e5ed" providerId="ADAL" clId="{FFF1DA74-BEAE-470B-8D8A-B7A1F3E1BF85}" dt="2026-05-27T13:00:48.091" v="2504" actId="20577"/>
+          <ac:spMkLst>
+            <pc:docMk/>
+            <pc:sldMk cId="1237004907" sldId="279"/>
+            <ac:spMk id="3" creationId="{C49DC867-5ED3-70E2-1474-E948A29DF620}"/>
+          </ac:spMkLst>
+        </pc:spChg>
+        <pc:spChg chg="add del mod">
+          <ac:chgData name="Alessandro Di Piazza" userId="242384fd-1746-4b70-8d90-c83f4330e5ed" providerId="ADAL" clId="{FFF1DA74-BEAE-470B-8D8A-B7A1F3E1BF85}" dt="2026-05-27T13:00:38.188" v="2501" actId="478"/>
+          <ac:spMkLst>
+            <pc:docMk/>
+            <pc:sldMk cId="1237004907" sldId="279"/>
+            <ac:spMk id="6" creationId="{9C6571F9-2E74-1009-A1C5-A8E74FCE880B}"/>
+          </ac:spMkLst>
+        </pc:spChg>
+        <pc:picChg chg="add mod">
+          <ac:chgData name="Alessandro Di Piazza" userId="242384fd-1746-4b70-8d90-c83f4330e5ed" providerId="ADAL" clId="{FFF1DA74-BEAE-470B-8D8A-B7A1F3E1BF85}" dt="2026-05-27T12:58:28.135" v="2484"/>
+          <ac:picMkLst>
+            <pc:docMk/>
+            <pc:sldMk cId="1237004907" sldId="279"/>
+            <ac:picMk id="4" creationId="{61BF8BCE-E974-3538-EEFA-8863FDCDA494}"/>
+          </ac:picMkLst>
+        </pc:picChg>
+      </pc:sldChg>
     </pc:docChg>
   </pc:docChgLst>
 </pc:chgInfo>
@@ -5681,19 +5841,7 @@
               <a:rPr lang="en-US" dirty="0">
                 <a:latin typeface="Consolas" panose="020B0609020204030204" pitchFamily="49" charset="0"/>
               </a:rPr>
-              <a:t>pip install </a:t>
-            </a:r>
-            <a:r>
-              <a:rPr lang="en-US" dirty="0" err="1">
-                <a:latin typeface="Consolas" panose="020B0609020204030204" pitchFamily="49" charset="0"/>
-              </a:rPr>
-              <a:t>redis</a:t>
-            </a:r>
-            <a:r>
-              <a:rPr lang="en-US" dirty="0">
-                <a:latin typeface="Consolas" panose="020B0609020204030204" pitchFamily="49" charset="0"/>
-              </a:rPr>
-              <a:t> sentence-transformers </a:t>
+              <a:t>pip install sentence-transformers </a:t>
             </a:r>
             <a:r>
               <a:rPr lang="en-US" dirty="0" err="1">
@@ -5711,7 +5859,7 @@
             </a:pPr>
             <a:r>
               <a:rPr lang="it-IT" noProof="0" dirty="0"/>
-              <a:t>Lanciamo chat3.py</a:t>
+              <a:t>Lanciamo rag</a:t>
             </a:r>
           </a:p>
         </p:txBody>
@@ -5738,7 +5886,7 @@
         </p:blipFill>
         <p:spPr>
           <a:xfrm>
-            <a:off x="7154390" y="2558501"/>
+            <a:off x="7853638" y="2146125"/>
             <a:ext cx="4086795" cy="3934374"/>
           </a:xfrm>
           <a:prstGeom prst="rect">
@@ -5750,6 +5898,231 @@
     <p:extLst>
       <p:ext uri="{BB962C8B-B14F-4D97-AF65-F5344CB8AC3E}">
         <p14:creationId xmlns:p14="http://schemas.microsoft.com/office/powerpoint/2010/main" val="781585204"/>
+      </p:ext>
+    </p:extLst>
+  </p:cSld>
+  <p:clrMapOvr>
+    <a:masterClrMapping/>
+  </p:clrMapOvr>
+</p:sld>
+</file>
+
+<file path=ppt/slides/slide19.xml><?xml version="1.0" encoding="utf-8"?>
+<p:sld xmlns:a="http://schemas.openxmlformats.org/drawingml/2006/main" xmlns:r="http://schemas.openxmlformats.org/officeDocument/2006/relationships" xmlns:p="http://schemas.openxmlformats.org/presentationml/2006/main">
+  <p:cSld>
+    <p:spTree>
+      <p:nvGrpSpPr>
+        <p:cNvPr id="1" name=""/>
+        <p:cNvGrpSpPr/>
+        <p:nvPr/>
+      </p:nvGrpSpPr>
+      <p:grpSpPr>
+        <a:xfrm>
+          <a:off x="0" y="0"/>
+          <a:ext cx="0" cy="0"/>
+          <a:chOff x="0" y="0"/>
+          <a:chExt cx="0" cy="0"/>
+        </a:xfrm>
+      </p:grpSpPr>
+      <p:sp>
+        <p:nvSpPr>
+          <p:cNvPr id="2" name="Title 1">
+            <a:extLst>
+              <a:ext uri="{FF2B5EF4-FFF2-40B4-BE49-F238E27FC236}">
+                <a16:creationId xmlns:a16="http://schemas.microsoft.com/office/drawing/2014/main" id="{D05ACDF2-FA74-5FF8-E0A3-484C44089926}"/>
+              </a:ext>
+            </a:extLst>
+          </p:cNvPr>
+          <p:cNvSpPr>
+            <a:spLocks noGrp="1"/>
+          </p:cNvSpPr>
+          <p:nvPr>
+            <p:ph type="title"/>
+          </p:nvPr>
+        </p:nvSpPr>
+        <p:spPr/>
+        <p:txBody>
+          <a:bodyPr/>
+          <a:lstStyle/>
+          <a:p>
+            <a:r>
+              <a:rPr lang="en-US" dirty="0"/>
+              <a:t>Model Context Protocol</a:t>
+            </a:r>
+          </a:p>
+        </p:txBody>
+      </p:sp>
+      <p:sp>
+        <p:nvSpPr>
+          <p:cNvPr id="3" name="Content Placeholder 2">
+            <a:extLst>
+              <a:ext uri="{FF2B5EF4-FFF2-40B4-BE49-F238E27FC236}">
+                <a16:creationId xmlns:a16="http://schemas.microsoft.com/office/drawing/2014/main" id="{17AE8612-A405-5581-58B7-0F767C660828}"/>
+              </a:ext>
+            </a:extLst>
+          </p:cNvPr>
+          <p:cNvSpPr>
+            <a:spLocks noGrp="1"/>
+          </p:cNvSpPr>
+          <p:nvPr>
+            <p:ph idx="1"/>
+          </p:nvPr>
+        </p:nvSpPr>
+        <p:spPr/>
+        <p:txBody>
+          <a:bodyPr>
+            <a:normAutofit fontScale="77500" lnSpcReduction="20000"/>
+          </a:bodyPr>
+          <a:lstStyle/>
+          <a:p>
+            <a:pPr marL="0" indent="0">
+              <a:buNone/>
+            </a:pPr>
+            <a:r>
+              <a:rPr lang="it-IT" dirty="0"/>
+              <a:t>MCP è un protocollo che permette agli LLM di usare strumenti esterni.</a:t>
+            </a:r>
+          </a:p>
+          <a:p>
+            <a:pPr marL="0" indent="0">
+              <a:buNone/>
+            </a:pPr>
+            <a:r>
+              <a:rPr lang="it-IT" dirty="0"/>
+              <a:t>Un modello AI può:</a:t>
+            </a:r>
+          </a:p>
+          <a:p>
+            <a:r>
+              <a:rPr lang="it-IT" dirty="0"/>
+              <a:t>leggere file </a:t>
+            </a:r>
+          </a:p>
+          <a:p>
+            <a:r>
+              <a:rPr lang="it-IT" dirty="0"/>
+              <a:t>interrogare database </a:t>
+            </a:r>
+          </a:p>
+          <a:p>
+            <a:r>
+              <a:rPr lang="it-IT" dirty="0"/>
+              <a:t>usare API </a:t>
+            </a:r>
+          </a:p>
+          <a:p>
+            <a:r>
+              <a:rPr lang="it-IT" dirty="0"/>
+              <a:t>eseguire funzioni Python </a:t>
+            </a:r>
+          </a:p>
+          <a:p>
+            <a:r>
+              <a:rPr lang="it-IT" dirty="0"/>
+              <a:t>accedere a servizi esterni</a:t>
+            </a:r>
+          </a:p>
+          <a:p>
+            <a:pPr marL="0" indent="0">
+              <a:buNone/>
+            </a:pPr>
+            <a:endParaRPr lang="en-US" dirty="0"/>
+          </a:p>
+          <a:p>
+            <a:pPr marL="0" indent="0">
+              <a:buNone/>
+            </a:pPr>
+            <a:r>
+              <a:rPr lang="it-IT" dirty="0"/>
+              <a:t>Trasformare un LLM da:</a:t>
+            </a:r>
+          </a:p>
+          <a:p>
+            <a:pPr marL="0" indent="0">
+              <a:buNone/>
+            </a:pPr>
+            <a:r>
+              <a:rPr lang="it-IT" dirty="0"/>
+              <a:t>solo chat</a:t>
+            </a:r>
+          </a:p>
+          <a:p>
+            <a:pPr marL="0" indent="0">
+              <a:buNone/>
+            </a:pPr>
+            <a:r>
+              <a:rPr lang="it-IT" dirty="0"/>
+              <a:t>a:</a:t>
+            </a:r>
+          </a:p>
+          <a:p>
+            <a:pPr marL="0" indent="0">
+              <a:buNone/>
+            </a:pPr>
+            <a:r>
+              <a:rPr lang="it-IT" dirty="0"/>
+              <a:t>AI Agent con strumenti reali</a:t>
+            </a:r>
+          </a:p>
+          <a:p>
+            <a:pPr marL="0" indent="0">
+              <a:buNone/>
+            </a:pPr>
+            <a:endParaRPr lang="en-US" dirty="0"/>
+          </a:p>
+        </p:txBody>
+      </p:sp>
+      <p:pic>
+        <p:nvPicPr>
+          <p:cNvPr id="2052" name="Picture 4" descr="Model Context Protocol (MCP): approfondimenti sui rischi e sui controlli di  sicurezza">
+            <a:extLst>
+              <a:ext uri="{FF2B5EF4-FFF2-40B4-BE49-F238E27FC236}">
+                <a16:creationId xmlns:a16="http://schemas.microsoft.com/office/drawing/2014/main" id="{F689ADB7-1E93-06EA-80C1-53BF37ECF6D1}"/>
+              </a:ext>
+            </a:extLst>
+          </p:cNvPr>
+          <p:cNvPicPr>
+            <a:picLocks noChangeAspect="1" noChangeArrowheads="1"/>
+          </p:cNvPicPr>
+          <p:nvPr/>
+        </p:nvPicPr>
+        <p:blipFill>
+          <a:blip r:embed="rId2">
+            <a:extLst>
+              <a:ext uri="{28A0092B-C50C-407E-A947-70E740481C1C}">
+                <a14:useLocalDpi xmlns:a14="http://schemas.microsoft.com/office/drawing/2010/main" val="0"/>
+              </a:ext>
+            </a:extLst>
+          </a:blip>
+          <a:srcRect/>
+          <a:stretch>
+            <a:fillRect/>
+          </a:stretch>
+        </p:blipFill>
+        <p:spPr bwMode="auto">
+          <a:xfrm>
+            <a:off x="5455128" y="2451847"/>
+            <a:ext cx="5716016" cy="3500718"/>
+          </a:xfrm>
+          <a:prstGeom prst="rect">
+            <a:avLst/>
+          </a:prstGeom>
+          <a:noFill/>
+          <a:extLst>
+            <a:ext uri="{909E8E84-426E-40DD-AFC4-6F175D3DCCD1}">
+              <a14:hiddenFill xmlns:a14="http://schemas.microsoft.com/office/drawing/2010/main">
+                <a:solidFill>
+                  <a:srgbClr val="FFFFFF"/>
+                </a:solidFill>
+              </a14:hiddenFill>
+            </a:ext>
+          </a:extLst>
+        </p:spPr>
+      </p:pic>
+    </p:spTree>
+    <p:extLst>
+      <p:ext uri="{BB962C8B-B14F-4D97-AF65-F5344CB8AC3E}">
+        <p14:creationId xmlns:p14="http://schemas.microsoft.com/office/powerpoint/2010/main" val="3664682121"/>
       </p:ext>
     </p:extLst>
   </p:cSld>
@@ -5940,6 +6313,735 @@
     <p:extLst>
       <p:ext uri="{BB962C8B-B14F-4D97-AF65-F5344CB8AC3E}">
         <p14:creationId xmlns:p14="http://schemas.microsoft.com/office/powerpoint/2010/main" val="4235319617"/>
+      </p:ext>
+    </p:extLst>
+  </p:cSld>
+  <p:clrMapOvr>
+    <a:masterClrMapping/>
+  </p:clrMapOvr>
+</p:sld>
+</file>
+
+<file path=ppt/slides/slide20.xml><?xml version="1.0" encoding="utf-8"?>
+<p:sld xmlns:a="http://schemas.openxmlformats.org/drawingml/2006/main" xmlns:r="http://schemas.openxmlformats.org/officeDocument/2006/relationships" xmlns:p="http://schemas.openxmlformats.org/presentationml/2006/main">
+  <p:cSld>
+    <p:spTree>
+      <p:nvGrpSpPr>
+        <p:cNvPr id="1" name="">
+          <a:extLst>
+            <a:ext uri="{FF2B5EF4-FFF2-40B4-BE49-F238E27FC236}">
+              <a16:creationId xmlns:a16="http://schemas.microsoft.com/office/drawing/2014/main" id="{5079AEDB-CF15-CAB4-AF91-DFD75136773F}"/>
+            </a:ext>
+          </a:extLst>
+        </p:cNvPr>
+        <p:cNvGrpSpPr/>
+        <p:nvPr/>
+      </p:nvGrpSpPr>
+      <p:grpSpPr>
+        <a:xfrm>
+          <a:off x="0" y="0"/>
+          <a:ext cx="0" cy="0"/>
+          <a:chOff x="0" y="0"/>
+          <a:chExt cx="0" cy="0"/>
+        </a:xfrm>
+      </p:grpSpPr>
+      <p:sp>
+        <p:nvSpPr>
+          <p:cNvPr id="2" name="Title 1">
+            <a:extLst>
+              <a:ext uri="{FF2B5EF4-FFF2-40B4-BE49-F238E27FC236}">
+                <a16:creationId xmlns:a16="http://schemas.microsoft.com/office/drawing/2014/main" id="{F6662C15-8ECF-0E7E-9668-FABD03F52280}"/>
+              </a:ext>
+            </a:extLst>
+          </p:cNvPr>
+          <p:cNvSpPr>
+            <a:spLocks noGrp="1"/>
+          </p:cNvSpPr>
+          <p:nvPr>
+            <p:ph type="title"/>
+          </p:nvPr>
+        </p:nvSpPr>
+        <p:spPr/>
+        <p:txBody>
+          <a:bodyPr/>
+          <a:lstStyle/>
+          <a:p>
+            <a:r>
+              <a:rPr lang="en-US" dirty="0"/>
+              <a:t>Model Context Protocol</a:t>
+            </a:r>
+          </a:p>
+        </p:txBody>
+      </p:sp>
+      <p:sp>
+        <p:nvSpPr>
+          <p:cNvPr id="3" name="Content Placeholder 2">
+            <a:extLst>
+              <a:ext uri="{FF2B5EF4-FFF2-40B4-BE49-F238E27FC236}">
+                <a16:creationId xmlns:a16="http://schemas.microsoft.com/office/drawing/2014/main" id="{1BE6ABF3-7277-B9F7-DE38-C760E051C70B}"/>
+              </a:ext>
+            </a:extLst>
+          </p:cNvPr>
+          <p:cNvSpPr>
+            <a:spLocks noGrp="1"/>
+          </p:cNvSpPr>
+          <p:nvPr>
+            <p:ph idx="1"/>
+          </p:nvPr>
+        </p:nvSpPr>
+        <p:spPr>
+          <a:xfrm>
+            <a:off x="838200" y="3429000"/>
+            <a:ext cx="4540624" cy="2665693"/>
+          </a:xfrm>
+        </p:spPr>
+        <p:txBody>
+          <a:bodyPr>
+            <a:normAutofit/>
+          </a:bodyPr>
+          <a:lstStyle/>
+          <a:p>
+            <a:r>
+              <a:rPr lang="it-IT" sz="2000" b="1" dirty="0"/>
+              <a:t>MCP Client</a:t>
+            </a:r>
+          </a:p>
+          <a:p>
+            <a:pPr marL="0" indent="0">
+              <a:buNone/>
+            </a:pPr>
+            <a:r>
+              <a:rPr lang="it-IT" sz="2000" dirty="0"/>
+              <a:t>Gestisce la comunicazione con il modello.</a:t>
+            </a:r>
+          </a:p>
+          <a:p>
+            <a:r>
+              <a:rPr lang="it-IT" sz="2000" b="1" dirty="0"/>
+              <a:t>MCP Server</a:t>
+            </a:r>
+          </a:p>
+          <a:p>
+            <a:pPr marL="0" indent="0">
+              <a:buNone/>
+            </a:pPr>
+            <a:r>
+              <a:rPr lang="it-IT" sz="2000" dirty="0"/>
+              <a:t>Espone strumenti utilizzabili.</a:t>
+            </a:r>
+          </a:p>
+          <a:p>
+            <a:r>
+              <a:rPr lang="it-IT" sz="2000" b="1" dirty="0"/>
+              <a:t>Tools</a:t>
+            </a:r>
+          </a:p>
+          <a:p>
+            <a:pPr marL="0" indent="0">
+              <a:buNone/>
+            </a:pPr>
+            <a:r>
+              <a:rPr lang="it-IT" sz="2000" dirty="0"/>
+              <a:t>Funzioni richiamabili dall’AI.</a:t>
+            </a:r>
+          </a:p>
+        </p:txBody>
+      </p:sp>
+      <p:pic>
+        <p:nvPicPr>
+          <p:cNvPr id="2052" name="Picture 4" descr="Model Context Protocol (MCP): approfondimenti sui rischi e sui controlli di  sicurezza">
+            <a:extLst>
+              <a:ext uri="{FF2B5EF4-FFF2-40B4-BE49-F238E27FC236}">
+                <a16:creationId xmlns:a16="http://schemas.microsoft.com/office/drawing/2014/main" id="{98BF1D37-5020-0E2E-FC1F-A83473DAAD07}"/>
+              </a:ext>
+            </a:extLst>
+          </p:cNvPr>
+          <p:cNvPicPr>
+            <a:picLocks noChangeAspect="1" noChangeArrowheads="1"/>
+          </p:cNvPicPr>
+          <p:nvPr/>
+        </p:nvPicPr>
+        <p:blipFill>
+          <a:blip r:embed="rId2">
+            <a:extLst>
+              <a:ext uri="{28A0092B-C50C-407E-A947-70E740481C1C}">
+                <a14:useLocalDpi xmlns:a14="http://schemas.microsoft.com/office/drawing/2010/main" val="0"/>
+              </a:ext>
+            </a:extLst>
+          </a:blip>
+          <a:srcRect/>
+          <a:stretch>
+            <a:fillRect/>
+          </a:stretch>
+        </p:blipFill>
+        <p:spPr bwMode="auto">
+          <a:xfrm>
+            <a:off x="5455128" y="2451847"/>
+            <a:ext cx="5716016" cy="3500718"/>
+          </a:xfrm>
+          <a:prstGeom prst="rect">
+            <a:avLst/>
+          </a:prstGeom>
+          <a:noFill/>
+          <a:extLst>
+            <a:ext uri="{909E8E84-426E-40DD-AFC4-6F175D3DCCD1}">
+              <a14:hiddenFill xmlns:a14="http://schemas.microsoft.com/office/drawing/2010/main">
+                <a:solidFill>
+                  <a:srgbClr val="FFFFFF"/>
+                </a:solidFill>
+              </a14:hiddenFill>
+            </a:ext>
+          </a:extLst>
+        </p:spPr>
+      </p:pic>
+    </p:spTree>
+    <p:extLst>
+      <p:ext uri="{BB962C8B-B14F-4D97-AF65-F5344CB8AC3E}">
+        <p14:creationId xmlns:p14="http://schemas.microsoft.com/office/powerpoint/2010/main" val="3005548171"/>
+      </p:ext>
+    </p:extLst>
+  </p:cSld>
+  <p:clrMapOvr>
+    <a:masterClrMapping/>
+  </p:clrMapOvr>
+</p:sld>
+</file>
+
+<file path=ppt/slides/slide21.xml><?xml version="1.0" encoding="utf-8"?>
+<p:sld xmlns:a="http://schemas.openxmlformats.org/drawingml/2006/main" xmlns:r="http://schemas.openxmlformats.org/officeDocument/2006/relationships" xmlns:p="http://schemas.openxmlformats.org/presentationml/2006/main">
+  <p:cSld>
+    <p:spTree>
+      <p:nvGrpSpPr>
+        <p:cNvPr id="1" name=""/>
+        <p:cNvGrpSpPr/>
+        <p:nvPr/>
+      </p:nvGrpSpPr>
+      <p:grpSpPr>
+        <a:xfrm>
+          <a:off x="0" y="0"/>
+          <a:ext cx="0" cy="0"/>
+          <a:chOff x="0" y="0"/>
+          <a:chExt cx="0" cy="0"/>
+        </a:xfrm>
+      </p:grpSpPr>
+      <p:sp>
+        <p:nvSpPr>
+          <p:cNvPr id="2" name="Title 1">
+            <a:extLst>
+              <a:ext uri="{FF2B5EF4-FFF2-40B4-BE49-F238E27FC236}">
+                <a16:creationId xmlns:a16="http://schemas.microsoft.com/office/drawing/2014/main" id="{FFFED3E2-FACD-1DC4-BDAB-317ECAE6ABDE}"/>
+              </a:ext>
+            </a:extLst>
+          </p:cNvPr>
+          <p:cNvSpPr>
+            <a:spLocks noGrp="1"/>
+          </p:cNvSpPr>
+          <p:nvPr>
+            <p:ph type="title"/>
+          </p:nvPr>
+        </p:nvSpPr>
+        <p:spPr/>
+        <p:txBody>
+          <a:bodyPr/>
+          <a:lstStyle/>
+          <a:p>
+            <a:r>
+              <a:rPr lang="en-US" dirty="0"/>
+              <a:t>Model Context Protocol</a:t>
+            </a:r>
+          </a:p>
+        </p:txBody>
+      </p:sp>
+      <p:sp>
+        <p:nvSpPr>
+          <p:cNvPr id="3" name="Content Placeholder 2">
+            <a:extLst>
+              <a:ext uri="{FF2B5EF4-FFF2-40B4-BE49-F238E27FC236}">
+                <a16:creationId xmlns:a16="http://schemas.microsoft.com/office/drawing/2014/main" id="{E835E16E-8E7A-D6A2-8F11-42EA5B125A1B}"/>
+              </a:ext>
+            </a:extLst>
+          </p:cNvPr>
+          <p:cNvSpPr>
+            <a:spLocks noGrp="1"/>
+          </p:cNvSpPr>
+          <p:nvPr>
+            <p:ph idx="1"/>
+          </p:nvPr>
+        </p:nvSpPr>
+        <p:spPr>
+          <a:xfrm>
+            <a:off x="838200" y="1825625"/>
+            <a:ext cx="4728884" cy="4351338"/>
+          </a:xfrm>
+        </p:spPr>
+        <p:txBody>
+          <a:bodyPr>
+            <a:normAutofit/>
+          </a:bodyPr>
+          <a:lstStyle/>
+          <a:p>
+            <a:pPr marL="0" indent="0">
+              <a:buNone/>
+            </a:pPr>
+            <a:r>
+              <a:rPr lang="it-IT" sz="1800" dirty="0"/>
+              <a:t>L’LLM può ora:</a:t>
+            </a:r>
+          </a:p>
+          <a:p>
+            <a:r>
+              <a:rPr lang="it-IT" sz="1800" dirty="0"/>
+              <a:t>vedere i tool disponibili </a:t>
+            </a:r>
+          </a:p>
+          <a:p>
+            <a:r>
+              <a:rPr lang="it-IT" sz="1800" dirty="0"/>
+              <a:t>scegliere quale tool usare </a:t>
+            </a:r>
+          </a:p>
+          <a:p>
+            <a:r>
+              <a:rPr lang="it-IT" sz="1800" dirty="0"/>
+              <a:t>eseguire la funzione </a:t>
+            </a:r>
+          </a:p>
+          <a:p>
+            <a:r>
+              <a:rPr lang="it-IT" sz="1800" dirty="0"/>
+              <a:t>usare il risultato nella risposta</a:t>
+            </a:r>
+          </a:p>
+          <a:p>
+            <a:endParaRPr lang="en-US" sz="1800" dirty="0"/>
+          </a:p>
+        </p:txBody>
+      </p:sp>
+      <p:sp>
+        <p:nvSpPr>
+          <p:cNvPr id="5" name="TextBox 4">
+            <a:extLst>
+              <a:ext uri="{FF2B5EF4-FFF2-40B4-BE49-F238E27FC236}">
+                <a16:creationId xmlns:a16="http://schemas.microsoft.com/office/drawing/2014/main" id="{350E9F45-3FF3-8E0B-4821-1C70DA63D422}"/>
+              </a:ext>
+            </a:extLst>
+          </p:cNvPr>
+          <p:cNvSpPr txBox="1"/>
+          <p:nvPr/>
+        </p:nvSpPr>
+        <p:spPr>
+          <a:xfrm>
+            <a:off x="6624918" y="1825625"/>
+            <a:ext cx="3953436" cy="3373359"/>
+          </a:xfrm>
+          <a:prstGeom prst="rect">
+            <a:avLst/>
+          </a:prstGeom>
+          <a:noFill/>
+        </p:spPr>
+        <p:txBody>
+          <a:bodyPr wrap="square">
+            <a:spAutoFit/>
+          </a:bodyPr>
+          <a:lstStyle/>
+          <a:p>
+            <a:pPr>
+              <a:lnSpc>
+                <a:spcPct val="150000"/>
+              </a:lnSpc>
+              <a:buNone/>
+            </a:pPr>
+            <a:r>
+              <a:rPr lang="en-US" b="1" dirty="0"/>
+              <a:t>Tool </a:t>
+            </a:r>
+            <a:r>
+              <a:rPr lang="en-US" b="1" dirty="0" err="1"/>
+              <a:t>possibili</a:t>
+            </a:r>
+            <a:endParaRPr lang="en-US" b="1" dirty="0"/>
+          </a:p>
+          <a:p>
+            <a:pPr>
+              <a:lnSpc>
+                <a:spcPct val="150000"/>
+              </a:lnSpc>
+              <a:buFont typeface="Arial" panose="020B0604020202020204" pitchFamily="34" charset="0"/>
+              <a:buChar char="•"/>
+            </a:pPr>
+            <a:r>
+              <a:rPr lang="en-US" dirty="0"/>
+              <a:t>filesystem </a:t>
+            </a:r>
+          </a:p>
+          <a:p>
+            <a:pPr>
+              <a:lnSpc>
+                <a:spcPct val="150000"/>
+              </a:lnSpc>
+              <a:buFont typeface="Arial" panose="020B0604020202020204" pitchFamily="34" charset="0"/>
+              <a:buChar char="•"/>
+            </a:pPr>
+            <a:r>
+              <a:rPr lang="en-US" dirty="0"/>
+              <a:t>database </a:t>
+            </a:r>
+          </a:p>
+          <a:p>
+            <a:pPr>
+              <a:lnSpc>
+                <a:spcPct val="150000"/>
+              </a:lnSpc>
+              <a:buFont typeface="Arial" panose="020B0604020202020204" pitchFamily="34" charset="0"/>
+              <a:buChar char="•"/>
+            </a:pPr>
+            <a:r>
+              <a:rPr lang="en-US" dirty="0"/>
+              <a:t>web search </a:t>
+            </a:r>
+          </a:p>
+          <a:p>
+            <a:pPr>
+              <a:lnSpc>
+                <a:spcPct val="150000"/>
+              </a:lnSpc>
+              <a:buFont typeface="Arial" panose="020B0604020202020204" pitchFamily="34" charset="0"/>
+              <a:buChar char="•"/>
+            </a:pPr>
+            <a:r>
+              <a:rPr lang="en-US" dirty="0"/>
+              <a:t>email </a:t>
+            </a:r>
+          </a:p>
+          <a:p>
+            <a:pPr>
+              <a:lnSpc>
+                <a:spcPct val="150000"/>
+              </a:lnSpc>
+              <a:buFont typeface="Arial" panose="020B0604020202020204" pitchFamily="34" charset="0"/>
+              <a:buChar char="•"/>
+            </a:pPr>
+            <a:r>
+              <a:rPr lang="en-US" dirty="0"/>
+              <a:t>calendar </a:t>
+            </a:r>
+          </a:p>
+          <a:p>
+            <a:pPr>
+              <a:lnSpc>
+                <a:spcPct val="150000"/>
+              </a:lnSpc>
+              <a:buFont typeface="Arial" panose="020B0604020202020204" pitchFamily="34" charset="0"/>
+              <a:buChar char="•"/>
+            </a:pPr>
+            <a:r>
+              <a:rPr lang="en-US" dirty="0"/>
+              <a:t>RAG search </a:t>
+            </a:r>
+          </a:p>
+          <a:p>
+            <a:pPr>
+              <a:lnSpc>
+                <a:spcPct val="150000"/>
+              </a:lnSpc>
+              <a:buFont typeface="Arial" panose="020B0604020202020204" pitchFamily="34" charset="0"/>
+              <a:buChar char="•"/>
+            </a:pPr>
+            <a:r>
+              <a:rPr lang="en-US" dirty="0"/>
+              <a:t>terminal commands</a:t>
+            </a:r>
+          </a:p>
+        </p:txBody>
+      </p:sp>
+    </p:spTree>
+    <p:extLst>
+      <p:ext uri="{BB962C8B-B14F-4D97-AF65-F5344CB8AC3E}">
+        <p14:creationId xmlns:p14="http://schemas.microsoft.com/office/powerpoint/2010/main" val="642528440"/>
+      </p:ext>
+    </p:extLst>
+  </p:cSld>
+  <p:clrMapOvr>
+    <a:masterClrMapping/>
+  </p:clrMapOvr>
+</p:sld>
+</file>
+
+<file path=ppt/slides/slide22.xml><?xml version="1.0" encoding="utf-8"?>
+<p:sld xmlns:a="http://schemas.openxmlformats.org/drawingml/2006/main" xmlns:r="http://schemas.openxmlformats.org/officeDocument/2006/relationships" xmlns:p="http://schemas.openxmlformats.org/presentationml/2006/main">
+  <p:cSld>
+    <p:spTree>
+      <p:nvGrpSpPr>
+        <p:cNvPr id="1" name=""/>
+        <p:cNvGrpSpPr/>
+        <p:nvPr/>
+      </p:nvGrpSpPr>
+      <p:grpSpPr>
+        <a:xfrm>
+          <a:off x="0" y="0"/>
+          <a:ext cx="0" cy="0"/>
+          <a:chOff x="0" y="0"/>
+          <a:chExt cx="0" cy="0"/>
+        </a:xfrm>
+      </p:grpSpPr>
+      <p:sp>
+        <p:nvSpPr>
+          <p:cNvPr id="2" name="Title 1">
+            <a:extLst>
+              <a:ext uri="{FF2B5EF4-FFF2-40B4-BE49-F238E27FC236}">
+                <a16:creationId xmlns:a16="http://schemas.microsoft.com/office/drawing/2014/main" id="{39C55D3D-6977-DE17-1CBD-7335022F1ED9}"/>
+              </a:ext>
+            </a:extLst>
+          </p:cNvPr>
+          <p:cNvSpPr>
+            <a:spLocks noGrp="1"/>
+          </p:cNvSpPr>
+          <p:nvPr>
+            <p:ph type="title"/>
+          </p:nvPr>
+        </p:nvSpPr>
+        <p:spPr/>
+        <p:txBody>
+          <a:bodyPr/>
+          <a:lstStyle/>
+          <a:p>
+            <a:r>
+              <a:rPr lang="en-US" dirty="0"/>
+              <a:t>Model Context Protocol</a:t>
+            </a:r>
+          </a:p>
+        </p:txBody>
+      </p:sp>
+      <p:pic>
+        <p:nvPicPr>
+          <p:cNvPr id="4" name="Picture 3">
+            <a:extLst>
+              <a:ext uri="{FF2B5EF4-FFF2-40B4-BE49-F238E27FC236}">
+                <a16:creationId xmlns:a16="http://schemas.microsoft.com/office/drawing/2014/main" id="{E85D1B1F-E92D-7266-3106-5ABA8C4F40A0}"/>
+              </a:ext>
+            </a:extLst>
+          </p:cNvPr>
+          <p:cNvPicPr>
+            <a:picLocks noChangeAspect="1"/>
+          </p:cNvPicPr>
+          <p:nvPr/>
+        </p:nvPicPr>
+        <p:blipFill>
+          <a:blip r:embed="rId2" cstate="print">
+            <a:extLst>
+              <a:ext uri="{28A0092B-C50C-407E-A947-70E740481C1C}">
+                <a14:useLocalDpi xmlns:a14="http://schemas.microsoft.com/office/drawing/2010/main" val="0"/>
+              </a:ext>
+            </a:extLst>
+          </a:blip>
+          <a:stretch>
+            <a:fillRect/>
+          </a:stretch>
+        </p:blipFill>
+        <p:spPr>
+          <a:xfrm>
+            <a:off x="2360612" y="2143312"/>
+            <a:ext cx="6861175" cy="3987800"/>
+          </a:xfrm>
+          <a:prstGeom prst="rect">
+            <a:avLst/>
+          </a:prstGeom>
+        </p:spPr>
+      </p:pic>
+    </p:spTree>
+    <p:extLst>
+      <p:ext uri="{BB962C8B-B14F-4D97-AF65-F5344CB8AC3E}">
+        <p14:creationId xmlns:p14="http://schemas.microsoft.com/office/powerpoint/2010/main" val="2708153801"/>
+      </p:ext>
+    </p:extLst>
+  </p:cSld>
+  <p:clrMapOvr>
+    <a:masterClrMapping/>
+  </p:clrMapOvr>
+</p:sld>
+</file>
+
+<file path=ppt/slides/slide23.xml><?xml version="1.0" encoding="utf-8"?>
+<p:sld xmlns:a="http://schemas.openxmlformats.org/drawingml/2006/main" xmlns:r="http://schemas.openxmlformats.org/officeDocument/2006/relationships" xmlns:p="http://schemas.openxmlformats.org/presentationml/2006/main">
+  <p:cSld>
+    <p:spTree>
+      <p:nvGrpSpPr>
+        <p:cNvPr id="1" name=""/>
+        <p:cNvGrpSpPr/>
+        <p:nvPr/>
+      </p:nvGrpSpPr>
+      <p:grpSpPr>
+        <a:xfrm>
+          <a:off x="0" y="0"/>
+          <a:ext cx="0" cy="0"/>
+          <a:chOff x="0" y="0"/>
+          <a:chExt cx="0" cy="0"/>
+        </a:xfrm>
+      </p:grpSpPr>
+      <p:sp>
+        <p:nvSpPr>
+          <p:cNvPr id="2" name="Title 1">
+            <a:extLst>
+              <a:ext uri="{FF2B5EF4-FFF2-40B4-BE49-F238E27FC236}">
+                <a16:creationId xmlns:a16="http://schemas.microsoft.com/office/drawing/2014/main" id="{31DB3AD2-6E69-AE17-914D-6C2AA9E62348}"/>
+              </a:ext>
+            </a:extLst>
+          </p:cNvPr>
+          <p:cNvSpPr>
+            <a:spLocks noGrp="1"/>
+          </p:cNvSpPr>
+          <p:nvPr>
+            <p:ph type="title"/>
+          </p:nvPr>
+        </p:nvSpPr>
+        <p:spPr/>
+        <p:txBody>
+          <a:bodyPr/>
+          <a:lstStyle/>
+          <a:p>
+            <a:r>
+              <a:rPr lang="en-US" dirty="0"/>
+              <a:t>Grazie</a:t>
+            </a:r>
+          </a:p>
+        </p:txBody>
+      </p:sp>
+      <p:sp>
+        <p:nvSpPr>
+          <p:cNvPr id="3" name="Content Placeholder 2">
+            <a:extLst>
+              <a:ext uri="{FF2B5EF4-FFF2-40B4-BE49-F238E27FC236}">
+                <a16:creationId xmlns:a16="http://schemas.microsoft.com/office/drawing/2014/main" id="{C49DC867-5ED3-70E2-1474-E948A29DF620}"/>
+              </a:ext>
+            </a:extLst>
+          </p:cNvPr>
+          <p:cNvSpPr>
+            <a:spLocks noGrp="1"/>
+          </p:cNvSpPr>
+          <p:nvPr>
+            <p:ph idx="1"/>
+          </p:nvPr>
+        </p:nvSpPr>
+        <p:spPr/>
+        <p:txBody>
+          <a:bodyPr>
+            <a:normAutofit/>
+          </a:bodyPr>
+          <a:lstStyle/>
+          <a:p>
+            <a:pPr marL="0" indent="0">
+              <a:buNone/>
+            </a:pPr>
+            <a:r>
+              <a:rPr lang="it-IT" sz="1800" b="1" dirty="0"/>
+              <a:t>Alessandro Di Piazza</a:t>
+            </a:r>
+          </a:p>
+          <a:p>
+            <a:pPr marL="0" indent="0">
+              <a:buNone/>
+            </a:pPr>
+            <a:r>
+              <a:rPr lang="it-IT" sz="1200" b="1" dirty="0"/>
+              <a:t>          </a:t>
+            </a:r>
+            <a:r>
+              <a:rPr lang="it-IT" sz="1200" b="1" dirty="0">
+                <a:hlinkClick r:id="rId2"/>
+              </a:rPr>
+              <a:t>https://www.linkedin.com/in/alessandrodipiazza/</a:t>
+            </a:r>
+            <a:endParaRPr lang="it-IT" sz="1200" b="1" dirty="0"/>
+          </a:p>
+          <a:p>
+            <a:pPr marL="0" indent="0">
+              <a:buNone/>
+            </a:pPr>
+            <a:r>
+              <a:rPr lang="it-IT" sz="1200" b="1" dirty="0"/>
+              <a:t>alessandro.dipiazza@gmail.com</a:t>
+            </a:r>
+          </a:p>
+          <a:p>
+            <a:pPr marL="0" indent="0">
+              <a:buNone/>
+            </a:pPr>
+            <a:r>
+              <a:rPr lang="it-IT" sz="1200" dirty="0">
+                <a:hlinkClick r:id="rId3"/>
+              </a:rPr>
+              <a:t>https://github.com/dipialx/Corso-Python</a:t>
+            </a:r>
+            <a:endParaRPr lang="it-IT" sz="1200" dirty="0"/>
+          </a:p>
+          <a:p>
+            <a:pPr marL="0" indent="0">
+              <a:buNone/>
+            </a:pPr>
+            <a:endParaRPr lang="it-IT" sz="1200" dirty="0"/>
+          </a:p>
+          <a:p>
+            <a:pPr marL="0" indent="0">
+              <a:buNone/>
+            </a:pPr>
+            <a:endParaRPr lang="it-IT" sz="1200" b="1" dirty="0"/>
+          </a:p>
+          <a:p>
+            <a:endParaRPr lang="en-US" sz="1200" dirty="0"/>
+          </a:p>
+        </p:txBody>
+      </p:sp>
+      <p:pic>
+        <p:nvPicPr>
+          <p:cNvPr id="4" name="Picture 4">
+            <a:extLst>
+              <a:ext uri="{FF2B5EF4-FFF2-40B4-BE49-F238E27FC236}">
+                <a16:creationId xmlns:a16="http://schemas.microsoft.com/office/drawing/2014/main" id="{61BF8BCE-E974-3538-EEFA-8863FDCDA494}"/>
+              </a:ext>
+            </a:extLst>
+          </p:cNvPr>
+          <p:cNvPicPr>
+            <a:picLocks noChangeAspect="1" noChangeArrowheads="1"/>
+          </p:cNvPicPr>
+          <p:nvPr/>
+        </p:nvPicPr>
+        <p:blipFill>
+          <a:blip r:embed="rId4">
+            <a:extLst>
+              <a:ext uri="{28A0092B-C50C-407E-A947-70E740481C1C}">
+                <a14:useLocalDpi xmlns:a14="http://schemas.microsoft.com/office/drawing/2010/main" val="0"/>
+              </a:ext>
+            </a:extLst>
+          </a:blip>
+          <a:srcRect/>
+          <a:stretch>
+            <a:fillRect/>
+          </a:stretch>
+        </p:blipFill>
+        <p:spPr bwMode="auto">
+          <a:xfrm>
+            <a:off x="873196" y="2195549"/>
+            <a:ext cx="354301" cy="286539"/>
+          </a:xfrm>
+          <a:prstGeom prst="rect">
+            <a:avLst/>
+          </a:prstGeom>
+          <a:noFill/>
+          <a:extLst>
+            <a:ext uri="{909E8E84-426E-40DD-AFC4-6F175D3DCCD1}">
+              <a14:hiddenFill xmlns:a14="http://schemas.microsoft.com/office/drawing/2010/main">
+                <a:solidFill>
+                  <a:srgbClr val="FFFFFF"/>
+                </a:solidFill>
+              </a14:hiddenFill>
+            </a:ext>
+          </a:extLst>
+        </p:spPr>
+      </p:pic>
+    </p:spTree>
+    <p:extLst>
+      <p:ext uri="{BB962C8B-B14F-4D97-AF65-F5344CB8AC3E}">
+        <p14:creationId xmlns:p14="http://schemas.microsoft.com/office/powerpoint/2010/main" val="1237004907"/>
       </p:ext>
     </p:extLst>
   </p:cSld>
@@ -7605,16 +8707,10 @@
               <a:buNone/>
             </a:pPr>
             <a:r>
-              <a:rPr lang="it-IT">
-                <a:latin typeface="Consolas" panose="020B0609020204030204" pitchFamily="49" charset="0"/>
-              </a:rPr>
-              <a:t>-&gt; redis_test.</a:t>
-            </a:r>
-            <a:r>
               <a:rPr lang="it-IT" dirty="0">
                 <a:latin typeface="Consolas" panose="020B0609020204030204" pitchFamily="49" charset="0"/>
               </a:rPr>
-              <a:t>py</a:t>
+              <a:t>-&gt; redis_test.py</a:t>
             </a:r>
             <a:endParaRPr lang="it-IT" noProof="0" dirty="0">
               <a:latin typeface="Consolas" panose="020B0609020204030204" pitchFamily="49" charset="0"/>

--- a/Lez6.pptx
+++ b/Lez6.pptx
@@ -139,7 +139,7 @@
   <pc:docChgLst>
     <pc:chgData name="Alessandro Di Piazza" userId="242384fd-1746-4b70-8d90-c83f4330e5ed" providerId="ADAL" clId="{FFF1DA74-BEAE-470B-8D8A-B7A1F3E1BF85}"/>
     <pc:docChg chg="undo custSel addSld delSld modSld sldOrd">
-      <pc:chgData name="Alessandro Di Piazza" userId="242384fd-1746-4b70-8d90-c83f4330e5ed" providerId="ADAL" clId="{FFF1DA74-BEAE-470B-8D8A-B7A1F3E1BF85}" dt="2026-05-27T13:00:48.091" v="2504" actId="20577"/>
+      <pc:chgData name="Alessandro Di Piazza" userId="242384fd-1746-4b70-8d90-c83f4330e5ed" providerId="ADAL" clId="{FFF1DA74-BEAE-470B-8D8A-B7A1F3E1BF85}" dt="2026-05-27T16:43:33.926" v="2506" actId="1076"/>
       <pc:docMkLst>
         <pc:docMk/>
       </pc:docMkLst>
@@ -940,7 +940,7 @@
         </pc:picChg>
       </pc:sldChg>
       <pc:sldChg chg="addSp delSp modSp new mod">
-        <pc:chgData name="Alessandro Di Piazza" userId="242384fd-1746-4b70-8d90-c83f4330e5ed" providerId="ADAL" clId="{FFF1DA74-BEAE-470B-8D8A-B7A1F3E1BF85}" dt="2026-05-27T13:00:48.091" v="2504" actId="20577"/>
+        <pc:chgData name="Alessandro Di Piazza" userId="242384fd-1746-4b70-8d90-c83f4330e5ed" providerId="ADAL" clId="{FFF1DA74-BEAE-470B-8D8A-B7A1F3E1BF85}" dt="2026-05-27T16:43:33.926" v="2506" actId="1076"/>
         <pc:sldMkLst>
           <pc:docMk/>
           <pc:sldMk cId="1237004907" sldId="279"/>
@@ -975,6 +975,14 @@
             <pc:docMk/>
             <pc:sldMk cId="1237004907" sldId="279"/>
             <ac:picMk id="4" creationId="{61BF8BCE-E974-3538-EEFA-8863FDCDA494}"/>
+          </ac:picMkLst>
+        </pc:picChg>
+        <pc:picChg chg="add mod">
+          <ac:chgData name="Alessandro Di Piazza" userId="242384fd-1746-4b70-8d90-c83f4330e5ed" providerId="ADAL" clId="{FFF1DA74-BEAE-470B-8D8A-B7A1F3E1BF85}" dt="2026-05-27T16:43:33.926" v="2506" actId="1076"/>
+          <ac:picMkLst>
+            <pc:docMk/>
+            <pc:sldMk cId="1237004907" sldId="279"/>
+            <ac:picMk id="6" creationId="{D3D5CF95-D72A-D29D-65D2-7DFED22061DC}"/>
           </ac:picMkLst>
         </pc:picChg>
       </pc:sldChg>
@@ -7038,6 +7046,36 @@
           </a:extLst>
         </p:spPr>
       </p:pic>
+      <p:pic>
+        <p:nvPicPr>
+          <p:cNvPr id="6" name="Picture 5">
+            <a:extLst>
+              <a:ext uri="{FF2B5EF4-FFF2-40B4-BE49-F238E27FC236}">
+                <a16:creationId xmlns:a16="http://schemas.microsoft.com/office/drawing/2014/main" id="{D3D5CF95-D72A-D29D-65D2-7DFED22061DC}"/>
+              </a:ext>
+            </a:extLst>
+          </p:cNvPr>
+          <p:cNvPicPr>
+            <a:picLocks noChangeAspect="1"/>
+          </p:cNvPicPr>
+          <p:nvPr/>
+        </p:nvPicPr>
+        <p:blipFill>
+          <a:blip r:embed="rId5"/>
+          <a:stretch>
+            <a:fillRect/>
+          </a:stretch>
+        </p:blipFill>
+        <p:spPr>
+          <a:xfrm>
+            <a:off x="7118325" y="1690688"/>
+            <a:ext cx="3029373" cy="3029373"/>
+          </a:xfrm>
+          <a:prstGeom prst="rect">
+            <a:avLst/>
+          </a:prstGeom>
+        </p:spPr>
+      </p:pic>
     </p:spTree>
     <p:extLst>
       <p:ext uri="{BB962C8B-B14F-4D97-AF65-F5344CB8AC3E}">

--- a/Lez6.pptx
+++ b/Lez6.pptx
@@ -11,23 +11,24 @@
     <p:sldId id="269" r:id="rId5"/>
     <p:sldId id="270" r:id="rId6"/>
     <p:sldId id="272" r:id="rId7"/>
-    <p:sldId id="271" r:id="rId8"/>
-    <p:sldId id="274" r:id="rId9"/>
-    <p:sldId id="273" r:id="rId10"/>
-    <p:sldId id="258" r:id="rId11"/>
-    <p:sldId id="259" r:id="rId12"/>
-    <p:sldId id="260" r:id="rId13"/>
-    <p:sldId id="261" r:id="rId14"/>
-    <p:sldId id="262" r:id="rId15"/>
-    <p:sldId id="263" r:id="rId16"/>
-    <p:sldId id="264" r:id="rId17"/>
-    <p:sldId id="265" r:id="rId18"/>
-    <p:sldId id="266" r:id="rId19"/>
-    <p:sldId id="275" r:id="rId20"/>
-    <p:sldId id="276" r:id="rId21"/>
-    <p:sldId id="277" r:id="rId22"/>
-    <p:sldId id="278" r:id="rId23"/>
-    <p:sldId id="279" r:id="rId24"/>
+    <p:sldId id="280" r:id="rId8"/>
+    <p:sldId id="271" r:id="rId9"/>
+    <p:sldId id="274" r:id="rId10"/>
+    <p:sldId id="273" r:id="rId11"/>
+    <p:sldId id="258" r:id="rId12"/>
+    <p:sldId id="259" r:id="rId13"/>
+    <p:sldId id="260" r:id="rId14"/>
+    <p:sldId id="261" r:id="rId15"/>
+    <p:sldId id="262" r:id="rId16"/>
+    <p:sldId id="263" r:id="rId17"/>
+    <p:sldId id="264" r:id="rId18"/>
+    <p:sldId id="265" r:id="rId19"/>
+    <p:sldId id="266" r:id="rId20"/>
+    <p:sldId id="275" r:id="rId21"/>
+    <p:sldId id="276" r:id="rId22"/>
+    <p:sldId id="277" r:id="rId23"/>
+    <p:sldId id="278" r:id="rId24"/>
+    <p:sldId id="279" r:id="rId25"/>
   </p:sldIdLst>
   <p:sldSz cx="12192000" cy="6858000"/>
   <p:notesSz cx="6858000" cy="9144000"/>
@@ -139,7 +140,7 @@
   <pc:docChgLst>
     <pc:chgData name="Alessandro Di Piazza" userId="242384fd-1746-4b70-8d90-c83f4330e5ed" providerId="ADAL" clId="{FFF1DA74-BEAE-470B-8D8A-B7A1F3E1BF85}"/>
     <pc:docChg chg="undo custSel addSld delSld modSld sldOrd">
-      <pc:chgData name="Alessandro Di Piazza" userId="242384fd-1746-4b70-8d90-c83f4330e5ed" providerId="ADAL" clId="{FFF1DA74-BEAE-470B-8D8A-B7A1F3E1BF85}" dt="2026-05-27T16:43:33.926" v="2506" actId="1076"/>
+      <pc:chgData name="Alessandro Di Piazza" userId="242384fd-1746-4b70-8d90-c83f4330e5ed" providerId="ADAL" clId="{FFF1DA74-BEAE-470B-8D8A-B7A1F3E1BF85}" dt="2026-06-08T10:19:20.312" v="2625" actId="27636"/>
       <pc:docMkLst>
         <pc:docMk/>
       </pc:docMkLst>
@@ -256,7 +257,7 @@
         </pc:sldMkLst>
       </pc:sldChg>
       <pc:sldChg chg="addSp delSp modSp new mod">
-        <pc:chgData name="Alessandro Di Piazza" userId="242384fd-1746-4b70-8d90-c83f4330e5ed" providerId="ADAL" clId="{FFF1DA74-BEAE-470B-8D8A-B7A1F3E1BF85}" dt="2026-05-27T10:45:12.779" v="2328" actId="790"/>
+        <pc:chgData name="Alessandro Di Piazza" userId="242384fd-1746-4b70-8d90-c83f4330e5ed" providerId="ADAL" clId="{FFF1DA74-BEAE-470B-8D8A-B7A1F3E1BF85}" dt="2026-06-08T10:07:57.729" v="2548" actId="20577"/>
         <pc:sldMkLst>
           <pc:docMk/>
           <pc:sldMk cId="2830842287" sldId="260"/>
@@ -270,21 +271,13 @@
           </ac:spMkLst>
         </pc:spChg>
         <pc:spChg chg="mod">
-          <ac:chgData name="Alessandro Di Piazza" userId="242384fd-1746-4b70-8d90-c83f4330e5ed" providerId="ADAL" clId="{FFF1DA74-BEAE-470B-8D8A-B7A1F3E1BF85}" dt="2026-05-27T10:45:12.779" v="2328" actId="790"/>
+          <ac:chgData name="Alessandro Di Piazza" userId="242384fd-1746-4b70-8d90-c83f4330e5ed" providerId="ADAL" clId="{FFF1DA74-BEAE-470B-8D8A-B7A1F3E1BF85}" dt="2026-06-08T10:07:57.729" v="2548" actId="20577"/>
           <ac:spMkLst>
             <pc:docMk/>
             <pc:sldMk cId="2830842287" sldId="260"/>
             <ac:spMk id="3" creationId="{487C7ED8-D716-F038-5D2A-4A43AC5DBF7D}"/>
           </ac:spMkLst>
         </pc:spChg>
-        <pc:picChg chg="add del mod">
-          <ac:chgData name="Alessandro Di Piazza" userId="242384fd-1746-4b70-8d90-c83f4330e5ed" providerId="ADAL" clId="{FFF1DA74-BEAE-470B-8D8A-B7A1F3E1BF85}" dt="2026-05-27T09:49:43.781" v="1802" actId="478"/>
-          <ac:picMkLst>
-            <pc:docMk/>
-            <pc:sldMk cId="2830842287" sldId="260"/>
-            <ac:picMk id="5" creationId="{608FF62A-8A68-8B37-763D-431269CCB6F8}"/>
-          </ac:picMkLst>
-        </pc:picChg>
       </pc:sldChg>
       <pc:sldChg chg="addSp delSp modSp new del mod">
         <pc:chgData name="Alessandro Di Piazza" userId="242384fd-1746-4b70-8d90-c83f4330e5ed" providerId="ADAL" clId="{FFF1DA74-BEAE-470B-8D8A-B7A1F3E1BF85}" dt="2026-05-25T08:52:29.505" v="1185" actId="47"/>
@@ -345,7 +338,7 @@
         </pc:sldMkLst>
       </pc:sldChg>
       <pc:sldChg chg="modSp new mod">
-        <pc:chgData name="Alessandro Di Piazza" userId="242384fd-1746-4b70-8d90-c83f4330e5ed" providerId="ADAL" clId="{FFF1DA74-BEAE-470B-8D8A-B7A1F3E1BF85}" dt="2026-05-27T10:45:12.779" v="2328" actId="790"/>
+        <pc:chgData name="Alessandro Di Piazza" userId="242384fd-1746-4b70-8d90-c83f4330e5ed" providerId="ADAL" clId="{FFF1DA74-BEAE-470B-8D8A-B7A1F3E1BF85}" dt="2026-06-08T10:19:20.312" v="2625" actId="27636"/>
         <pc:sldMkLst>
           <pc:docMk/>
           <pc:sldMk cId="3962381380" sldId="262"/>
@@ -359,7 +352,7 @@
           </ac:spMkLst>
         </pc:spChg>
         <pc:spChg chg="mod">
-          <ac:chgData name="Alessandro Di Piazza" userId="242384fd-1746-4b70-8d90-c83f4330e5ed" providerId="ADAL" clId="{FFF1DA74-BEAE-470B-8D8A-B7A1F3E1BF85}" dt="2026-05-27T10:45:12.779" v="2328" actId="790"/>
+          <ac:chgData name="Alessandro Di Piazza" userId="242384fd-1746-4b70-8d90-c83f4330e5ed" providerId="ADAL" clId="{FFF1DA74-BEAE-470B-8D8A-B7A1F3E1BF85}" dt="2026-06-08T10:19:20.312" v="2625" actId="27636"/>
           <ac:spMkLst>
             <pc:docMk/>
             <pc:sldMk cId="3962381380" sldId="262"/>
@@ -750,14 +743,6 @@
             <ac:spMk id="2" creationId="{62A08C19-965C-7BE8-01B1-67715B68B14A}"/>
           </ac:spMkLst>
         </pc:spChg>
-        <pc:spChg chg="del mod">
-          <ac:chgData name="Alessandro Di Piazza" userId="242384fd-1746-4b70-8d90-c83f4330e5ed" providerId="ADAL" clId="{FFF1DA74-BEAE-470B-8D8A-B7A1F3E1BF85}" dt="2026-05-27T10:43:16.004" v="2300"/>
-          <ac:spMkLst>
-            <pc:docMk/>
-            <pc:sldMk cId="1881461928" sldId="274"/>
-            <ac:spMk id="3" creationId="{2A94C766-4189-38DB-408A-F4CBAE4809A1}"/>
-          </ac:spMkLst>
-        </pc:spChg>
         <pc:spChg chg="add mod">
           <ac:chgData name="Alessandro Di Piazza" userId="242384fd-1746-4b70-8d90-c83f4330e5ed" providerId="ADAL" clId="{FFF1DA74-BEAE-470B-8D8A-B7A1F3E1BF85}" dt="2026-05-27T10:45:12.779" v="2328" actId="790"/>
           <ac:spMkLst>
@@ -766,36 +751,12 @@
             <ac:spMk id="4" creationId="{193BEDE8-1686-6426-69A3-2E8E888D2540}"/>
           </ac:spMkLst>
         </pc:spChg>
-        <pc:spChg chg="add">
-          <ac:chgData name="Alessandro Di Piazza" userId="242384fd-1746-4b70-8d90-c83f4330e5ed" providerId="ADAL" clId="{FFF1DA74-BEAE-470B-8D8A-B7A1F3E1BF85}" dt="2026-05-27T10:43:31.505" v="2305"/>
-          <ac:spMkLst>
-            <pc:docMk/>
-            <pc:sldMk cId="1881461928" sldId="274"/>
-            <ac:spMk id="5" creationId="{561CA704-E2EF-068E-F65E-AFC51410FDAD}"/>
-          </ac:spMkLst>
-        </pc:spChg>
-        <pc:spChg chg="add">
-          <ac:chgData name="Alessandro Di Piazza" userId="242384fd-1746-4b70-8d90-c83f4330e5ed" providerId="ADAL" clId="{FFF1DA74-BEAE-470B-8D8A-B7A1F3E1BF85}" dt="2026-05-27T10:43:35.055" v="2306"/>
-          <ac:spMkLst>
-            <pc:docMk/>
-            <pc:sldMk cId="1881461928" sldId="274"/>
-            <ac:spMk id="6" creationId="{2BF92771-236A-59BC-A823-19BDC419D687}"/>
-          </ac:spMkLst>
-        </pc:spChg>
         <pc:spChg chg="add mod">
           <ac:chgData name="Alessandro Di Piazza" userId="242384fd-1746-4b70-8d90-c83f4330e5ed" providerId="ADAL" clId="{FFF1DA74-BEAE-470B-8D8A-B7A1F3E1BF85}" dt="2026-05-27T10:45:12.779" v="2328" actId="790"/>
           <ac:spMkLst>
             <pc:docMk/>
             <pc:sldMk cId="1881461928" sldId="274"/>
             <ac:spMk id="8" creationId="{E2C5EE82-2BE7-B683-86DF-DA0DC71C031B}"/>
-          </ac:spMkLst>
-        </pc:spChg>
-        <pc:spChg chg="add">
-          <ac:chgData name="Alessandro Di Piazza" userId="242384fd-1746-4b70-8d90-c83f4330e5ed" providerId="ADAL" clId="{FFF1DA74-BEAE-470B-8D8A-B7A1F3E1BF85}" dt="2026-05-27T10:43:44.792" v="2310"/>
-          <ac:spMkLst>
-            <pc:docMk/>
-            <pc:sldMk cId="1881461928" sldId="274"/>
-            <ac:spMk id="9" creationId="{EBAB4437-2C9D-9F28-BE94-962A6A952979}"/>
           </ac:spMkLst>
         </pc:spChg>
         <pc:spChg chg="add mod">
@@ -845,14 +806,6 @@
             <ac:spMk id="3" creationId="{17AE8612-A405-5581-58B7-0F767C660828}"/>
           </ac:spMkLst>
         </pc:spChg>
-        <pc:picChg chg="add del mod">
-          <ac:chgData name="Alessandro Di Piazza" userId="242384fd-1746-4b70-8d90-c83f4330e5ed" providerId="ADAL" clId="{FFF1DA74-BEAE-470B-8D8A-B7A1F3E1BF85}" dt="2026-05-27T12:49:57.661" v="2442" actId="478"/>
-          <ac:picMkLst>
-            <pc:docMk/>
-            <pc:sldMk cId="3664682121" sldId="275"/>
-            <ac:picMk id="2050" creationId="{67FF4FDC-363F-01FF-3EC2-BD36C7B76F6C}"/>
-          </ac:picMkLst>
-        </pc:picChg>
         <pc:picChg chg="add mod">
           <ac:chgData name="Alessandro Di Piazza" userId="242384fd-1746-4b70-8d90-c83f4330e5ed" providerId="ADAL" clId="{FFF1DA74-BEAE-470B-8D8A-B7A1F3E1BF85}" dt="2026-05-27T12:50:09.333" v="2445" actId="1076"/>
           <ac:picMkLst>
@@ -922,14 +875,6 @@
             <ac:spMk id="2" creationId="{39C55D3D-6977-DE17-1CBD-7335022F1ED9}"/>
           </ac:spMkLst>
         </pc:spChg>
-        <pc:spChg chg="del">
-          <ac:chgData name="Alessandro Di Piazza" userId="242384fd-1746-4b70-8d90-c83f4330e5ed" providerId="ADAL" clId="{FFF1DA74-BEAE-470B-8D8A-B7A1F3E1BF85}" dt="2026-05-27T12:57:52.262" v="2473" actId="478"/>
-          <ac:spMkLst>
-            <pc:docMk/>
-            <pc:sldMk cId="2708153801" sldId="278"/>
-            <ac:spMk id="3" creationId="{F3CBC53A-5C19-6E87-C11F-C7812EE4EAB6}"/>
-          </ac:spMkLst>
-        </pc:spChg>
         <pc:picChg chg="add mod">
           <ac:chgData name="Alessandro Di Piazza" userId="242384fd-1746-4b70-8d90-c83f4330e5ed" providerId="ADAL" clId="{FFF1DA74-BEAE-470B-8D8A-B7A1F3E1BF85}" dt="2026-05-27T12:57:53.824" v="2475" actId="1076"/>
           <ac:picMkLst>
@@ -961,14 +906,6 @@
             <ac:spMk id="3" creationId="{C49DC867-5ED3-70E2-1474-E948A29DF620}"/>
           </ac:spMkLst>
         </pc:spChg>
-        <pc:spChg chg="add del mod">
-          <ac:chgData name="Alessandro Di Piazza" userId="242384fd-1746-4b70-8d90-c83f4330e5ed" providerId="ADAL" clId="{FFF1DA74-BEAE-470B-8D8A-B7A1F3E1BF85}" dt="2026-05-27T13:00:38.188" v="2501" actId="478"/>
-          <ac:spMkLst>
-            <pc:docMk/>
-            <pc:sldMk cId="1237004907" sldId="279"/>
-            <ac:spMk id="6" creationId="{9C6571F9-2E74-1009-A1C5-A8E74FCE880B}"/>
-          </ac:spMkLst>
-        </pc:spChg>
         <pc:picChg chg="add mod">
           <ac:chgData name="Alessandro Di Piazza" userId="242384fd-1746-4b70-8d90-c83f4330e5ed" providerId="ADAL" clId="{FFF1DA74-BEAE-470B-8D8A-B7A1F3E1BF85}" dt="2026-05-27T12:58:28.135" v="2484"/>
           <ac:picMkLst>
@@ -985,6 +922,29 @@
             <ac:picMk id="6" creationId="{D3D5CF95-D72A-D29D-65D2-7DFED22061DC}"/>
           </ac:picMkLst>
         </pc:picChg>
+      </pc:sldChg>
+      <pc:sldChg chg="modSp new mod">
+        <pc:chgData name="Alessandro Di Piazza" userId="242384fd-1746-4b70-8d90-c83f4330e5ed" providerId="ADAL" clId="{FFF1DA74-BEAE-470B-8D8A-B7A1F3E1BF85}" dt="2026-06-08T09:00:22.686" v="2540" actId="20577"/>
+        <pc:sldMkLst>
+          <pc:docMk/>
+          <pc:sldMk cId="375987143" sldId="280"/>
+        </pc:sldMkLst>
+        <pc:spChg chg="mod">
+          <ac:chgData name="Alessandro Di Piazza" userId="242384fd-1746-4b70-8d90-c83f4330e5ed" providerId="ADAL" clId="{FFF1DA74-BEAE-470B-8D8A-B7A1F3E1BF85}" dt="2026-06-08T09:00:17.352" v="2514" actId="20577"/>
+          <ac:spMkLst>
+            <pc:docMk/>
+            <pc:sldMk cId="375987143" sldId="280"/>
+            <ac:spMk id="2" creationId="{78692E1C-8B59-EBAF-6759-93E9E3C1A0CC}"/>
+          </ac:spMkLst>
+        </pc:spChg>
+        <pc:spChg chg="mod">
+          <ac:chgData name="Alessandro Di Piazza" userId="242384fd-1746-4b70-8d90-c83f4330e5ed" providerId="ADAL" clId="{FFF1DA74-BEAE-470B-8D8A-B7A1F3E1BF85}" dt="2026-06-08T09:00:22.686" v="2540" actId="20577"/>
+          <ac:spMkLst>
+            <pc:docMk/>
+            <pc:sldMk cId="375987143" sldId="280"/>
+            <ac:spMk id="3" creationId="{0B52CBA7-1CDB-CD06-5B71-13CF3C38820F}"/>
+          </ac:spMkLst>
+        </pc:spChg>
       </pc:sldChg>
     </pc:docChg>
   </pc:docChgLst>
@@ -1138,7 +1098,7 @@
           <a:p>
             <a:fld id="{0365B9A4-39DC-4E39-840A-704E3970A69D}" type="datetimeFigureOut">
               <a:rPr lang="en-US" smtClean="0"/>
-              <a:t>5/27/2026</a:t>
+              <a:t>6/8/2026</a:t>
             </a:fld>
             <a:endParaRPr lang="en-US"/>
           </a:p>
@@ -1336,7 +1296,7 @@
           <a:p>
             <a:fld id="{0365B9A4-39DC-4E39-840A-704E3970A69D}" type="datetimeFigureOut">
               <a:rPr lang="en-US" smtClean="0"/>
-              <a:t>5/27/2026</a:t>
+              <a:t>6/8/2026</a:t>
             </a:fld>
             <a:endParaRPr lang="en-US"/>
           </a:p>
@@ -1544,7 +1504,7 @@
           <a:p>
             <a:fld id="{0365B9A4-39DC-4E39-840A-704E3970A69D}" type="datetimeFigureOut">
               <a:rPr lang="en-US" smtClean="0"/>
-              <a:t>5/27/2026</a:t>
+              <a:t>6/8/2026</a:t>
             </a:fld>
             <a:endParaRPr lang="en-US"/>
           </a:p>
@@ -1742,7 +1702,7 @@
           <a:p>
             <a:fld id="{0365B9A4-39DC-4E39-840A-704E3970A69D}" type="datetimeFigureOut">
               <a:rPr lang="en-US" smtClean="0"/>
-              <a:t>5/27/2026</a:t>
+              <a:t>6/8/2026</a:t>
             </a:fld>
             <a:endParaRPr lang="en-US"/>
           </a:p>
@@ -2017,7 +1977,7 @@
           <a:p>
             <a:fld id="{0365B9A4-39DC-4E39-840A-704E3970A69D}" type="datetimeFigureOut">
               <a:rPr lang="en-US" smtClean="0"/>
-              <a:t>5/27/2026</a:t>
+              <a:t>6/8/2026</a:t>
             </a:fld>
             <a:endParaRPr lang="en-US"/>
           </a:p>
@@ -2282,7 +2242,7 @@
           <a:p>
             <a:fld id="{0365B9A4-39DC-4E39-840A-704E3970A69D}" type="datetimeFigureOut">
               <a:rPr lang="en-US" smtClean="0"/>
-              <a:t>5/27/2026</a:t>
+              <a:t>6/8/2026</a:t>
             </a:fld>
             <a:endParaRPr lang="en-US"/>
           </a:p>
@@ -2694,7 +2654,7 @@
           <a:p>
             <a:fld id="{0365B9A4-39DC-4E39-840A-704E3970A69D}" type="datetimeFigureOut">
               <a:rPr lang="en-US" smtClean="0"/>
-              <a:t>5/27/2026</a:t>
+              <a:t>6/8/2026</a:t>
             </a:fld>
             <a:endParaRPr lang="en-US"/>
           </a:p>
@@ -2835,7 +2795,7 @@
           <a:p>
             <a:fld id="{0365B9A4-39DC-4E39-840A-704E3970A69D}" type="datetimeFigureOut">
               <a:rPr lang="en-US" smtClean="0"/>
-              <a:t>5/27/2026</a:t>
+              <a:t>6/8/2026</a:t>
             </a:fld>
             <a:endParaRPr lang="en-US"/>
           </a:p>
@@ -2948,7 +2908,7 @@
           <a:p>
             <a:fld id="{0365B9A4-39DC-4E39-840A-704E3970A69D}" type="datetimeFigureOut">
               <a:rPr lang="en-US" smtClean="0"/>
-              <a:t>5/27/2026</a:t>
+              <a:t>6/8/2026</a:t>
             </a:fld>
             <a:endParaRPr lang="en-US"/>
           </a:p>
@@ -3259,7 +3219,7 @@
           <a:p>
             <a:fld id="{0365B9A4-39DC-4E39-840A-704E3970A69D}" type="datetimeFigureOut">
               <a:rPr lang="en-US" smtClean="0"/>
-              <a:t>5/27/2026</a:t>
+              <a:t>6/8/2026</a:t>
             </a:fld>
             <a:endParaRPr lang="en-US"/>
           </a:p>
@@ -3547,7 +3507,7 @@
           <a:p>
             <a:fld id="{0365B9A4-39DC-4E39-840A-704E3970A69D}" type="datetimeFigureOut">
               <a:rPr lang="en-US" smtClean="0"/>
-              <a:t>5/27/2026</a:t>
+              <a:t>6/8/2026</a:t>
             </a:fld>
             <a:endParaRPr lang="en-US"/>
           </a:p>
@@ -3788,7 +3748,7 @@
           <a:p>
             <a:fld id="{0365B9A4-39DC-4E39-840A-704E3970A69D}" type="datetimeFigureOut">
               <a:rPr lang="en-US" smtClean="0"/>
-              <a:t>5/27/2026</a:t>
+              <a:t>6/8/2026</a:t>
             </a:fld>
             <a:endParaRPr lang="en-US"/>
           </a:p>
@@ -4355,7 +4315,7 @@
           <p:cNvPr id="2" name="Title 1">
             <a:extLst>
               <a:ext uri="{FF2B5EF4-FFF2-40B4-BE49-F238E27FC236}">
-                <a16:creationId xmlns:a16="http://schemas.microsoft.com/office/drawing/2014/main" id="{DF9F321A-3DBB-2CEA-D316-61BA3B8C91F8}"/>
+                <a16:creationId xmlns:a16="http://schemas.microsoft.com/office/drawing/2014/main" id="{4EFB6B44-1D6E-DBE8-9B01-B1983DEE03F1}"/>
               </a:ext>
             </a:extLst>
           </p:cNvPr>
@@ -4373,7 +4333,7 @@
           <a:p>
             <a:r>
               <a:rPr lang="it-IT" noProof="0" dirty="0"/>
-              <a:t>Large Language Model</a:t>
+              <a:t>Redis</a:t>
             </a:r>
           </a:p>
         </p:txBody>
@@ -4383,7 +4343,7 @@
           <p:cNvPr id="3" name="Content Placeholder 2">
             <a:extLst>
               <a:ext uri="{FF2B5EF4-FFF2-40B4-BE49-F238E27FC236}">
-                <a16:creationId xmlns:a16="http://schemas.microsoft.com/office/drawing/2014/main" id="{144BDDAD-F2BA-5EC9-FC79-760DE859A970}"/>
+                <a16:creationId xmlns:a16="http://schemas.microsoft.com/office/drawing/2014/main" id="{BDFD911A-8902-F101-1D9B-BE1E7163C952}"/>
               </a:ext>
             </a:extLst>
           </p:cNvPr>
@@ -4396,56 +4356,15 @@
         </p:nvSpPr>
         <p:spPr/>
         <p:txBody>
-          <a:bodyPr>
-            <a:normAutofit fontScale="55000" lnSpcReduction="20000"/>
-          </a:bodyPr>
-          <a:lstStyle/>
-          <a:p>
-            <a:pPr marL="0" indent="0">
-              <a:buNone/>
-            </a:pPr>
-            <a:r>
-              <a:rPr lang="it-IT" noProof="0" dirty="0"/>
-              <a:t>Un LLM è un modello AI addestrato su enormi quantità di testo.</a:t>
-            </a:r>
-          </a:p>
-          <a:p>
-            <a:pPr marL="0" indent="0">
-              <a:buNone/>
-            </a:pPr>
-            <a:r>
-              <a:rPr lang="it-IT" noProof="0" dirty="0"/>
-              <a:t>Può:</a:t>
-            </a:r>
-          </a:p>
-          <a:p>
-            <a:r>
-              <a:rPr lang="it-IT" noProof="0" dirty="0"/>
-              <a:t>rispondere a domande </a:t>
-            </a:r>
-          </a:p>
-          <a:p>
-            <a:r>
-              <a:rPr lang="it-IT" noProof="0" dirty="0"/>
-              <a:t>generare codice </a:t>
-            </a:r>
-          </a:p>
-          <a:p>
-            <a:r>
-              <a:rPr lang="it-IT" noProof="0" dirty="0"/>
-              <a:t>tradurre testi </a:t>
-            </a:r>
-          </a:p>
-          <a:p>
-            <a:r>
-              <a:rPr lang="it-IT" noProof="0" dirty="0"/>
-              <a:t>riassumere documenti </a:t>
-            </a:r>
-          </a:p>
-          <a:p>
-            <a:r>
-              <a:rPr lang="it-IT" noProof="0" dirty="0"/>
-              <a:t>creare contenuti </a:t>
+          <a:bodyPr/>
+          <a:lstStyle/>
+          <a:p>
+            <a:pPr marL="0" indent="0">
+              <a:buNone/>
+            </a:pPr>
+            <a:r>
+              <a:rPr lang="it-IT" noProof="0" dirty="0"/>
+              <a:t>docker exec -it redis-stack redis-cli</a:t>
             </a:r>
           </a:p>
           <a:p>
@@ -4460,45 +4379,53 @@
             </a:pPr>
             <a:r>
               <a:rPr lang="it-IT" noProof="0" dirty="0"/>
-              <a:t>Esempi:</a:t>
-            </a:r>
-          </a:p>
-          <a:p>
-            <a:r>
-              <a:rPr lang="it-IT" noProof="0" dirty="0"/>
-              <a:t>ChatGPT </a:t>
-            </a:r>
-          </a:p>
-          <a:p>
-            <a:r>
-              <a:rPr lang="it-IT" noProof="0" dirty="0"/>
-              <a:t>Claude </a:t>
-            </a:r>
-          </a:p>
-          <a:p>
-            <a:r>
-              <a:rPr lang="it-IT" noProof="0" dirty="0"/>
-              <a:t>Gemini </a:t>
-            </a:r>
-          </a:p>
-          <a:p>
-            <a:r>
-              <a:rPr lang="it-IT" noProof="0" dirty="0"/>
-              <a:t>Llama </a:t>
-            </a:r>
-          </a:p>
-          <a:p>
-            <a:r>
-              <a:rPr lang="it-IT" noProof="0" dirty="0"/>
-              <a:t>Mistral</a:t>
-            </a:r>
+              <a:t>SET nome "Alessandro"</a:t>
+            </a:r>
+            <a:br>
+              <a:rPr lang="it-IT" noProof="0" dirty="0"/>
+            </a:br>
+            <a:r>
+              <a:rPr lang="it-IT" noProof="0" dirty="0"/>
+              <a:t>GET nome</a:t>
+            </a:r>
+          </a:p>
+          <a:p>
+            <a:pPr marL="0" indent="0">
+              <a:buNone/>
+            </a:pPr>
+            <a:endParaRPr lang="it-IT" noProof="0" dirty="0"/>
+          </a:p>
+          <a:p>
+            <a:pPr marL="0" indent="0">
+              <a:buNone/>
+            </a:pPr>
+            <a:r>
+              <a:rPr lang="it-IT" noProof="0" dirty="0">
+                <a:latin typeface="Consolas" panose="020B0609020204030204" pitchFamily="49" charset="0"/>
+              </a:rPr>
+              <a:t>pip install redis</a:t>
+            </a:r>
+          </a:p>
+          <a:p>
+            <a:pPr marL="0" indent="0">
+              <a:buNone/>
+            </a:pPr>
+            <a:r>
+              <a:rPr lang="it-IT" dirty="0">
+                <a:latin typeface="Consolas" panose="020B0609020204030204" pitchFamily="49" charset="0"/>
+              </a:rPr>
+              <a:t>-&gt; redis_test.py</a:t>
+            </a:r>
+            <a:endParaRPr lang="it-IT" noProof="0" dirty="0">
+              <a:latin typeface="Consolas" panose="020B0609020204030204" pitchFamily="49" charset="0"/>
+            </a:endParaRPr>
           </a:p>
         </p:txBody>
       </p:sp>
     </p:spTree>
     <p:extLst>
       <p:ext uri="{BB962C8B-B14F-4D97-AF65-F5344CB8AC3E}">
-        <p14:creationId xmlns:p14="http://schemas.microsoft.com/office/powerpoint/2010/main" val="3630284680"/>
+        <p14:creationId xmlns:p14="http://schemas.microsoft.com/office/powerpoint/2010/main" val="1136373570"/>
       </p:ext>
     </p:extLst>
   </p:cSld>
@@ -4530,7 +4457,7 @@
           <p:cNvPr id="2" name="Title 1">
             <a:extLst>
               <a:ext uri="{FF2B5EF4-FFF2-40B4-BE49-F238E27FC236}">
-                <a16:creationId xmlns:a16="http://schemas.microsoft.com/office/drawing/2014/main" id="{BA4E784E-99D4-BC68-3839-781606648FCF}"/>
+                <a16:creationId xmlns:a16="http://schemas.microsoft.com/office/drawing/2014/main" id="{DF9F321A-3DBB-2CEA-D316-61BA3B8C91F8}"/>
               </a:ext>
             </a:extLst>
           </p:cNvPr>
@@ -4548,7 +4475,7 @@
           <a:p>
             <a:r>
               <a:rPr lang="it-IT" noProof="0" dirty="0"/>
-              <a:t>Come funziona un LLM</a:t>
+              <a:t>Large Language Model</a:t>
             </a:r>
           </a:p>
         </p:txBody>
@@ -4558,7 +4485,7 @@
           <p:cNvPr id="3" name="Content Placeholder 2">
             <a:extLst>
               <a:ext uri="{FF2B5EF4-FFF2-40B4-BE49-F238E27FC236}">
-                <a16:creationId xmlns:a16="http://schemas.microsoft.com/office/drawing/2014/main" id="{2D8183A8-9750-5E15-58C0-695064248923}"/>
+                <a16:creationId xmlns:a16="http://schemas.microsoft.com/office/drawing/2014/main" id="{144BDDAD-F2BA-5EC9-FC79-760DE859A970}"/>
               </a:ext>
             </a:extLst>
           </p:cNvPr>
@@ -4569,15 +4496,10 @@
             <p:ph idx="1"/>
           </p:nvPr>
         </p:nvSpPr>
-        <p:spPr>
-          <a:xfrm>
-            <a:off x="712694" y="1762872"/>
-            <a:ext cx="10515600" cy="4351338"/>
-          </a:xfrm>
-        </p:spPr>
+        <p:spPr/>
         <p:txBody>
           <a:bodyPr>
-            <a:normAutofit lnSpcReduction="10000"/>
+            <a:normAutofit fontScale="55000" lnSpcReduction="20000"/>
           </a:bodyPr>
           <a:lstStyle/>
           <a:p>
@@ -4585,38 +4507,47 @@
               <a:buNone/>
             </a:pPr>
             <a:r>
-              <a:rPr lang="it-IT" b="1" noProof="0" dirty="0"/>
-              <a:t>Processo semplificato</a:t>
-            </a:r>
-          </a:p>
-          <a:p>
-            <a:r>
-              <a:rPr lang="it-IT" noProof="0" dirty="0"/>
-              <a:t>Input dell’utente </a:t>
-            </a:r>
-          </a:p>
-          <a:p>
-            <a:r>
-              <a:rPr lang="it-IT" noProof="0" dirty="0"/>
-              <a:t>Tokenizzazione </a:t>
-            </a:r>
-          </a:p>
-          <a:p>
-            <a:r>
-              <a:rPr lang="it-IT" noProof="0" dirty="0"/>
-              <a:t>Analisi del contesto </a:t>
-            </a:r>
-          </a:p>
-          <a:p>
-            <a:r>
-              <a:rPr lang="it-IT" noProof="0" dirty="0"/>
-              <a:t>Predizione del token successivo </a:t>
-            </a:r>
-          </a:p>
-          <a:p>
-            <a:r>
-              <a:rPr lang="it-IT" noProof="0" dirty="0"/>
-              <a:t>Generazione risposta </a:t>
+              <a:rPr lang="it-IT" noProof="0" dirty="0"/>
+              <a:t>Un LLM è un modello AI addestrato su enormi quantità di testo.</a:t>
+            </a:r>
+          </a:p>
+          <a:p>
+            <a:pPr marL="0" indent="0">
+              <a:buNone/>
+            </a:pPr>
+            <a:r>
+              <a:rPr lang="it-IT" noProof="0" dirty="0"/>
+              <a:t>Può:</a:t>
+            </a:r>
+          </a:p>
+          <a:p>
+            <a:r>
+              <a:rPr lang="it-IT" noProof="0" dirty="0"/>
+              <a:t>rispondere a domande </a:t>
+            </a:r>
+          </a:p>
+          <a:p>
+            <a:r>
+              <a:rPr lang="it-IT" noProof="0" dirty="0"/>
+              <a:t>generare codice </a:t>
+            </a:r>
+          </a:p>
+          <a:p>
+            <a:r>
+              <a:rPr lang="it-IT" noProof="0" dirty="0"/>
+              <a:t>tradurre testi </a:t>
+            </a:r>
+          </a:p>
+          <a:p>
+            <a:r>
+              <a:rPr lang="it-IT" noProof="0" dirty="0"/>
+              <a:t>riassumere documenti </a:t>
+            </a:r>
+          </a:p>
+          <a:p>
+            <a:r>
+              <a:rPr lang="it-IT" noProof="0" dirty="0"/>
+              <a:t>creare contenuti </a:t>
             </a:r>
           </a:p>
           <a:p>
@@ -4631,25 +4562,45 @@
             </a:pPr>
             <a:r>
               <a:rPr lang="it-IT" noProof="0" dirty="0"/>
-              <a:t>Gli LLM non “pensano”:</a:t>
-            </a:r>
-            <a:br>
-              <a:rPr lang="it-IT" noProof="0" dirty="0"/>
-            </a:br>
-            <a:r>
-              <a:rPr lang="it-IT" noProof="0" dirty="0"/>
-              <a:t>predicono il testo più probabile.</a:t>
-            </a:r>
-          </a:p>
-          <a:p>
-            <a:endParaRPr lang="it-IT" noProof="0" dirty="0"/>
+              <a:t>Esempi:</a:t>
+            </a:r>
+          </a:p>
+          <a:p>
+            <a:r>
+              <a:rPr lang="it-IT" noProof="0" dirty="0"/>
+              <a:t>ChatGPT </a:t>
+            </a:r>
+          </a:p>
+          <a:p>
+            <a:r>
+              <a:rPr lang="it-IT" noProof="0" dirty="0"/>
+              <a:t>Claude </a:t>
+            </a:r>
+          </a:p>
+          <a:p>
+            <a:r>
+              <a:rPr lang="it-IT" noProof="0" dirty="0"/>
+              <a:t>Gemini </a:t>
+            </a:r>
+          </a:p>
+          <a:p>
+            <a:r>
+              <a:rPr lang="it-IT" noProof="0" dirty="0"/>
+              <a:t>Llama </a:t>
+            </a:r>
+          </a:p>
+          <a:p>
+            <a:r>
+              <a:rPr lang="it-IT" noProof="0" dirty="0"/>
+              <a:t>Mistral</a:t>
+            </a:r>
           </a:p>
         </p:txBody>
       </p:sp>
     </p:spTree>
     <p:extLst>
       <p:ext uri="{BB962C8B-B14F-4D97-AF65-F5344CB8AC3E}">
-        <p14:creationId xmlns:p14="http://schemas.microsoft.com/office/powerpoint/2010/main" val="2671856089"/>
+        <p14:creationId xmlns:p14="http://schemas.microsoft.com/office/powerpoint/2010/main" val="3630284680"/>
       </p:ext>
     </p:extLst>
   </p:cSld>
@@ -4681,7 +4632,7 @@
           <p:cNvPr id="2" name="Title 1">
             <a:extLst>
               <a:ext uri="{FF2B5EF4-FFF2-40B4-BE49-F238E27FC236}">
-                <a16:creationId xmlns:a16="http://schemas.microsoft.com/office/drawing/2014/main" id="{9E328BC5-F348-3B6B-2791-4D799E3D64A2}"/>
+                <a16:creationId xmlns:a16="http://schemas.microsoft.com/office/drawing/2014/main" id="{BA4E784E-99D4-BC68-3839-781606648FCF}"/>
               </a:ext>
             </a:extLst>
           </p:cNvPr>
@@ -4699,7 +4650,7 @@
           <a:p>
             <a:r>
               <a:rPr lang="it-IT" noProof="0" dirty="0"/>
-              <a:t>Token</a:t>
+              <a:t>Come funziona un LLM</a:t>
             </a:r>
           </a:p>
         </p:txBody>
@@ -4709,7 +4660,7 @@
           <p:cNvPr id="3" name="Content Placeholder 2">
             <a:extLst>
               <a:ext uri="{FF2B5EF4-FFF2-40B4-BE49-F238E27FC236}">
-                <a16:creationId xmlns:a16="http://schemas.microsoft.com/office/drawing/2014/main" id="{487C7ED8-D716-F038-5D2A-4A43AC5DBF7D}"/>
+                <a16:creationId xmlns:a16="http://schemas.microsoft.com/office/drawing/2014/main" id="{2D8183A8-9750-5E15-58C0-695064248923}"/>
               </a:ext>
             </a:extLst>
           </p:cNvPr>
@@ -4720,10 +4671,15 @@
             <p:ph idx="1"/>
           </p:nvPr>
         </p:nvSpPr>
-        <p:spPr/>
+        <p:spPr>
+          <a:xfrm>
+            <a:off x="712694" y="1762872"/>
+            <a:ext cx="10515600" cy="4351338"/>
+          </a:xfrm>
+        </p:spPr>
         <p:txBody>
           <a:bodyPr>
-            <a:normAutofit fontScale="62500" lnSpcReduction="20000"/>
+            <a:normAutofit lnSpcReduction="10000"/>
           </a:bodyPr>
           <a:lstStyle/>
           <a:p>
@@ -4732,37 +4688,37 @@
             </a:pPr>
             <a:r>
               <a:rPr lang="it-IT" b="1" noProof="0" dirty="0"/>
-              <a:t>Cos’è un token</a:t>
-            </a:r>
-          </a:p>
-          <a:p>
-            <a:r>
-              <a:rPr lang="it-IT" noProof="0" dirty="0"/>
-              <a:t>Un token è una piccola parte di testo.</a:t>
-            </a:r>
-          </a:p>
-          <a:p>
-            <a:r>
-              <a:rPr lang="it-IT" noProof="0" dirty="0"/>
-              <a:t>Esempi:</a:t>
-            </a:r>
-          </a:p>
-          <a:p>
-            <a:r>
-              <a:rPr lang="it-IT" noProof="0" dirty="0"/>
-              <a:t>parola </a:t>
-            </a:r>
-          </a:p>
-          <a:p>
-            <a:r>
-              <a:rPr lang="it-IT" noProof="0" dirty="0"/>
-              <a:t>sillaba </a:t>
-            </a:r>
-          </a:p>
-          <a:p>
-            <a:r>
-              <a:rPr lang="it-IT" noProof="0" dirty="0"/>
-              <a:t>punteggiatura </a:t>
+              <a:t>Processo semplificato</a:t>
+            </a:r>
+          </a:p>
+          <a:p>
+            <a:r>
+              <a:rPr lang="it-IT" noProof="0" dirty="0"/>
+              <a:t>Input dell’utente </a:t>
+            </a:r>
+          </a:p>
+          <a:p>
+            <a:r>
+              <a:rPr lang="it-IT" noProof="0" dirty="0"/>
+              <a:t>Tokenizzazione </a:t>
+            </a:r>
+          </a:p>
+          <a:p>
+            <a:r>
+              <a:rPr lang="it-IT" noProof="0" dirty="0"/>
+              <a:t>Analisi del contesto </a:t>
+            </a:r>
+          </a:p>
+          <a:p>
+            <a:r>
+              <a:rPr lang="it-IT" noProof="0" dirty="0"/>
+              <a:t>Predizione del token successivo </a:t>
+            </a:r>
+          </a:p>
+          <a:p>
+            <a:r>
+              <a:rPr lang="it-IT" noProof="0" dirty="0"/>
+              <a:t>Generazione risposta </a:t>
             </a:r>
           </a:p>
           <a:p>
@@ -4777,49 +4733,14 @@
             </a:pPr>
             <a:r>
               <a:rPr lang="it-IT" noProof="0" dirty="0"/>
-              <a:t>Frase:</a:t>
-            </a:r>
-          </a:p>
-          <a:p>
-            <a:pPr marL="0" indent="0">
-              <a:buNone/>
-            </a:pPr>
-            <a:r>
-              <a:rPr lang="it-IT" noProof="0" dirty="0"/>
-              <a:t>	Python is awesome</a:t>
-            </a:r>
-          </a:p>
-          <a:p>
-            <a:pPr marL="0" indent="0">
-              <a:buNone/>
-            </a:pPr>
-            <a:r>
-              <a:rPr lang="it-IT" noProof="0" dirty="0"/>
-              <a:t>Possibili token:</a:t>
-            </a:r>
-          </a:p>
-          <a:p>
-            <a:pPr marL="0" indent="0">
-              <a:buNone/>
-            </a:pPr>
-            <a:r>
-              <a:rPr lang="it-IT" noProof="0" dirty="0"/>
-              <a:t>	["Python", " is", " awesome"]</a:t>
-            </a:r>
-          </a:p>
-          <a:p>
-            <a:pPr marL="0" indent="0">
-              <a:buNone/>
-            </a:pPr>
-            <a:endParaRPr lang="it-IT" noProof="0" dirty="0"/>
-          </a:p>
-          <a:p>
-            <a:pPr marL="0" indent="0">
-              <a:buNone/>
-            </a:pPr>
-            <a:r>
-              <a:rPr lang="it-IT" noProof="0" dirty="0"/>
-              <a:t>Gli LLM lavorano sui token, non sulle parole complete.</a:t>
+              <a:t>Gli LLM non “pensano”:</a:t>
+            </a:r>
+            <a:br>
+              <a:rPr lang="it-IT" noProof="0" dirty="0"/>
+            </a:br>
+            <a:r>
+              <a:rPr lang="it-IT" noProof="0" dirty="0"/>
+              <a:t>predicono il testo più probabile.</a:t>
             </a:r>
           </a:p>
           <a:p>
@@ -4830,7 +4751,7 @@
     </p:spTree>
     <p:extLst>
       <p:ext uri="{BB962C8B-B14F-4D97-AF65-F5344CB8AC3E}">
-        <p14:creationId xmlns:p14="http://schemas.microsoft.com/office/powerpoint/2010/main" val="2830842287"/>
+        <p14:creationId xmlns:p14="http://schemas.microsoft.com/office/powerpoint/2010/main" val="2671856089"/>
       </p:ext>
     </p:extLst>
   </p:cSld>
@@ -4862,7 +4783,7 @@
           <p:cNvPr id="2" name="Title 1">
             <a:extLst>
               <a:ext uri="{FF2B5EF4-FFF2-40B4-BE49-F238E27FC236}">
-                <a16:creationId xmlns:a16="http://schemas.microsoft.com/office/drawing/2014/main" id="{F793D46B-7E30-B732-0B5F-6E6809874D3A}"/>
+                <a16:creationId xmlns:a16="http://schemas.microsoft.com/office/drawing/2014/main" id="{9E328BC5-F348-3B6B-2791-4D799E3D64A2}"/>
               </a:ext>
             </a:extLst>
           </p:cNvPr>
@@ -4880,7 +4801,7 @@
           <a:p>
             <a:r>
               <a:rPr lang="it-IT" noProof="0" dirty="0"/>
-              <a:t>Prompt Engineering</a:t>
+              <a:t>Token</a:t>
             </a:r>
           </a:p>
         </p:txBody>
@@ -4890,7 +4811,7 @@
           <p:cNvPr id="3" name="Content Placeholder 2">
             <a:extLst>
               <a:ext uri="{FF2B5EF4-FFF2-40B4-BE49-F238E27FC236}">
-                <a16:creationId xmlns:a16="http://schemas.microsoft.com/office/drawing/2014/main" id="{D3381AD2-43A0-150D-1ECF-68520D70D83F}"/>
+                <a16:creationId xmlns:a16="http://schemas.microsoft.com/office/drawing/2014/main" id="{487C7ED8-D716-F038-5D2A-4A43AC5DBF7D}"/>
               </a:ext>
             </a:extLst>
           </p:cNvPr>
@@ -4904,7 +4825,7 @@
         <p:spPr/>
         <p:txBody>
           <a:bodyPr>
-            <a:normAutofit fontScale="40000" lnSpcReduction="20000"/>
+            <a:normAutofit fontScale="62500" lnSpcReduction="20000"/>
           </a:bodyPr>
           <a:lstStyle/>
           <a:p>
@@ -4912,26 +4833,38 @@
               <a:buNone/>
             </a:pPr>
             <a:r>
-              <a:rPr lang="it-IT" noProof="0" dirty="0"/>
-              <a:t>Un buon prompt deve essere:</a:t>
-            </a:r>
-          </a:p>
-          <a:p>
-            <a:r>
-              <a:rPr lang="it-IT" noProof="0" dirty="0"/>
-              <a:t>chiaro </a:t>
-            </a:r>
-          </a:p>
-          <a:p>
-            <a:r>
-              <a:rPr lang="it-IT" noProof="0" dirty="0"/>
-              <a:t>specifico </a:t>
-            </a:r>
-          </a:p>
-          <a:p>
-            <a:r>
-              <a:rPr lang="it-IT" noProof="0" dirty="0"/>
-              <a:t>contestualizzato </a:t>
+              <a:rPr lang="it-IT" b="1" noProof="0" dirty="0"/>
+              <a:t>Cos’è un token</a:t>
+            </a:r>
+          </a:p>
+          <a:p>
+            <a:r>
+              <a:rPr lang="it-IT" noProof="0" dirty="0"/>
+              <a:t>Un token è una piccola parte di testo.</a:t>
+            </a:r>
+          </a:p>
+          <a:p>
+            <a:r>
+              <a:rPr lang="it-IT" noProof="0" dirty="0"/>
+              <a:t>Esempi:</a:t>
+            </a:r>
+          </a:p>
+          <a:p>
+            <a:r>
+              <a:rPr lang="it-IT" noProof="0" dirty="0"/>
+              <a:t>parola </a:t>
+            </a:r>
+          </a:p>
+          <a:p>
+            <a:r>
+              <a:rPr lang="it-IT" noProof="0" dirty="0"/>
+              <a:t>sillaba </a:t>
+            </a:r>
+          </a:p>
+          <a:p>
+            <a:r>
+              <a:rPr lang="it-IT" noProof="0" dirty="0"/>
+              <a:t>punteggiatura </a:t>
             </a:r>
           </a:p>
           <a:p>
@@ -4946,18 +4879,34 @@
             </a:pPr>
             <a:r>
               <a:rPr lang="it-IT" noProof="0" dirty="0"/>
-              <a:t>Esempio debole:</a:t>
-            </a:r>
-          </a:p>
-          <a:p>
-            <a:pPr marL="0" indent="0">
-              <a:buNone/>
-            </a:pPr>
-            <a:r>
-              <a:rPr lang="it-IT" noProof="0" dirty="0">
-                <a:latin typeface="Consolas" panose="020B0609020204030204" pitchFamily="49" charset="0"/>
-              </a:rPr>
-              <a:t>Scrivi codice Python</a:t>
+              <a:t>Frase:</a:t>
+            </a:r>
+          </a:p>
+          <a:p>
+            <a:pPr marL="0" indent="0">
+              <a:buNone/>
+            </a:pPr>
+            <a:r>
+              <a:rPr lang="it-IT" noProof="0" dirty="0"/>
+              <a:t>	Python is awesome</a:t>
+            </a:r>
+          </a:p>
+          <a:p>
+            <a:pPr marL="0" indent="0">
+              <a:buNone/>
+            </a:pPr>
+            <a:r>
+              <a:rPr lang="it-IT" noProof="0" dirty="0"/>
+              <a:t>Possibili token:</a:t>
+            </a:r>
+          </a:p>
+          <a:p>
+            <a:pPr marL="0" indent="0">
+              <a:buNone/>
+            </a:pPr>
+            <a:r>
+              <a:rPr lang="it-IT" noProof="0" dirty="0"/>
+              <a:t>	["Python", "is", "awesome"]</a:t>
             </a:r>
           </a:p>
           <a:p>
@@ -4972,86 +4921,18 @@
             </a:pPr>
             <a:r>
               <a:rPr lang="it-IT" noProof="0" dirty="0"/>
-              <a:t>Esempio migliore:</a:t>
-            </a:r>
-          </a:p>
-          <a:p>
-            <a:pPr marL="0" indent="0">
-              <a:buNone/>
-            </a:pPr>
-            <a:r>
-              <a:rPr lang="it-IT" noProof="0" dirty="0">
-                <a:latin typeface="Consolas" panose="020B0609020204030204" pitchFamily="49" charset="0"/>
-              </a:rPr>
-              <a:t>Scrivi una funzione Python che legga un file CSV usando pandas</a:t>
-            </a:r>
-          </a:p>
-          <a:p>
-            <a:pPr marL="0" indent="0">
-              <a:buNone/>
-            </a:pPr>
-            <a:endParaRPr lang="it-IT" b="1" noProof="0" dirty="0"/>
-          </a:p>
-          <a:p>
-            <a:pPr marL="0" indent="0">
-              <a:buNone/>
-            </a:pPr>
-            <a:r>
-              <a:rPr lang="it-IT" b="1" noProof="0" dirty="0"/>
-              <a:t>Temperature</a:t>
-            </a:r>
-          </a:p>
-          <a:p>
-            <a:pPr marL="0" indent="0">
-              <a:buNone/>
-            </a:pPr>
-            <a:r>
-              <a:rPr lang="it-IT" noProof="0" dirty="0"/>
-              <a:t>Controlla la creatività del modello.</a:t>
-            </a:r>
-          </a:p>
-          <a:p>
-            <a:pPr marL="0" indent="0">
-              <a:buNone/>
-            </a:pPr>
-            <a:r>
-              <a:rPr lang="it-IT" noProof="0" dirty="0"/>
-              <a:t>	0 → risposte precise </a:t>
-            </a:r>
-          </a:p>
-          <a:p>
-            <a:pPr marL="0" indent="0">
-              <a:buNone/>
-            </a:pPr>
-            <a:r>
-              <a:rPr lang="it-IT" noProof="0" dirty="0"/>
-              <a:t>	1 → risposte creative </a:t>
-            </a:r>
-          </a:p>
-          <a:p>
-            <a:pPr marL="0" indent="0">
-              <a:buNone/>
-            </a:pPr>
-            <a:r>
-              <a:rPr lang="it-IT" b="1" noProof="0" dirty="0"/>
-              <a:t>Max Tokens</a:t>
-            </a:r>
-          </a:p>
-          <a:p>
-            <a:pPr marL="0" indent="0">
-              <a:buNone/>
-            </a:pPr>
-            <a:r>
-              <a:rPr lang="it-IT" noProof="0" dirty="0"/>
-              <a:t>Numero massimo di token generati.</a:t>
-            </a:r>
+              <a:t>Gli LLM lavorano sui token, non sulle parole complete.</a:t>
+            </a:r>
+          </a:p>
+          <a:p>
+            <a:endParaRPr lang="it-IT" noProof="0" dirty="0"/>
           </a:p>
         </p:txBody>
       </p:sp>
     </p:spTree>
     <p:extLst>
       <p:ext uri="{BB962C8B-B14F-4D97-AF65-F5344CB8AC3E}">
-        <p14:creationId xmlns:p14="http://schemas.microsoft.com/office/powerpoint/2010/main" val="1762387843"/>
+        <p14:creationId xmlns:p14="http://schemas.microsoft.com/office/powerpoint/2010/main" val="2830842287"/>
       </p:ext>
     </p:extLst>
   </p:cSld>
@@ -5083,7 +4964,7 @@
           <p:cNvPr id="2" name="Title 1">
             <a:extLst>
               <a:ext uri="{FF2B5EF4-FFF2-40B4-BE49-F238E27FC236}">
-                <a16:creationId xmlns:a16="http://schemas.microsoft.com/office/drawing/2014/main" id="{35316690-8711-B50B-642F-4F8E6A3A6709}"/>
+                <a16:creationId xmlns:a16="http://schemas.microsoft.com/office/drawing/2014/main" id="{F793D46B-7E30-B732-0B5F-6E6809874D3A}"/>
               </a:ext>
             </a:extLst>
           </p:cNvPr>
@@ -5101,7 +4982,7 @@
           <a:p>
             <a:r>
               <a:rPr lang="it-IT" noProof="0" dirty="0"/>
-              <a:t>Google AI Studio</a:t>
+              <a:t>Prompt Engineering</a:t>
             </a:r>
           </a:p>
         </p:txBody>
@@ -5111,7 +4992,7 @@
           <p:cNvPr id="3" name="Content Placeholder 2">
             <a:extLst>
               <a:ext uri="{FF2B5EF4-FFF2-40B4-BE49-F238E27FC236}">
-                <a16:creationId xmlns:a16="http://schemas.microsoft.com/office/drawing/2014/main" id="{2C261B15-C03E-CCDC-8C51-C50DED6B9A0B}"/>
+                <a16:creationId xmlns:a16="http://schemas.microsoft.com/office/drawing/2014/main" id="{D3381AD2-43A0-150D-1ECF-68520D70D83F}"/>
               </a:ext>
             </a:extLst>
           </p:cNvPr>
@@ -5124,66 +5005,147 @@
         </p:nvSpPr>
         <p:spPr/>
         <p:txBody>
-          <a:bodyPr/>
-          <a:lstStyle/>
+          <a:bodyPr>
+            <a:normAutofit fontScale="40000" lnSpcReduction="20000"/>
+          </a:bodyPr>
+          <a:lstStyle/>
+          <a:p>
+            <a:pPr marL="0" indent="0">
+              <a:buNone/>
+            </a:pPr>
+            <a:r>
+              <a:rPr lang="it-IT" noProof="0" dirty="0"/>
+              <a:t>Un buon prompt deve essere:</a:t>
+            </a:r>
+          </a:p>
+          <a:p>
+            <a:r>
+              <a:rPr lang="it-IT" noProof="0" dirty="0"/>
+              <a:t>chiaro </a:t>
+            </a:r>
+          </a:p>
+          <a:p>
+            <a:r>
+              <a:rPr lang="it-IT" noProof="0" dirty="0"/>
+              <a:t>specifico </a:t>
+            </a:r>
+          </a:p>
+          <a:p>
+            <a:r>
+              <a:rPr lang="it-IT" noProof="0" dirty="0"/>
+              <a:t>contestualizzato </a:t>
+            </a:r>
+          </a:p>
+          <a:p>
+            <a:pPr marL="0" indent="0">
+              <a:buNone/>
+            </a:pPr>
+            <a:endParaRPr lang="it-IT" noProof="0" dirty="0"/>
+          </a:p>
+          <a:p>
+            <a:pPr marL="0" indent="0">
+              <a:buNone/>
+            </a:pPr>
+            <a:r>
+              <a:rPr lang="it-IT" noProof="0" dirty="0"/>
+              <a:t>Esempio debole:</a:t>
+            </a:r>
+          </a:p>
           <a:p>
             <a:pPr marL="0" indent="0">
               <a:buNone/>
             </a:pPr>
             <a:r>
               <a:rPr lang="it-IT" noProof="0" dirty="0">
-                <a:hlinkClick r:id="rId2"/>
+                <a:latin typeface="Consolas" panose="020B0609020204030204" pitchFamily="49" charset="0"/>
               </a:rPr>
-              <a:t>https://aistudio.google.com</a:t>
-            </a:r>
+              <a:t>Scrivi codice Python</a:t>
+            </a:r>
+          </a:p>
+          <a:p>
+            <a:pPr marL="0" indent="0">
+              <a:buNone/>
+            </a:pPr>
             <a:endParaRPr lang="it-IT" noProof="0" dirty="0"/>
           </a:p>
           <a:p>
             <a:pPr marL="0" indent="0">
               <a:buNone/>
             </a:pPr>
-            <a:endParaRPr lang="it-IT" noProof="0" dirty="0"/>
-          </a:p>
-          <a:p>
-            <a:pPr marL="0" indent="0">
-              <a:buNone/>
-            </a:pPr>
-            <a:r>
-              <a:rPr lang="it-IT" noProof="0" dirty="0"/>
-              <a:t>#pip install openai</a:t>
-            </a:r>
-          </a:p>
-          <a:p>
-            <a:pPr marL="0" indent="0">
-              <a:buNone/>
-            </a:pPr>
-            <a:r>
-              <a:rPr lang="it-IT" noProof="0" dirty="0"/>
-              <a:t>#pip install google-generativeai</a:t>
-            </a:r>
-          </a:p>
-          <a:p>
-            <a:pPr marL="0" indent="0">
-              <a:buNone/>
-            </a:pPr>
-            <a:r>
-              <a:rPr lang="it-IT" noProof="0" dirty="0"/>
-              <a:t>#pip install python-dotenv</a:t>
-            </a:r>
-          </a:p>
-          <a:p>
-            <a:pPr marL="0" indent="0">
-              <a:buNone/>
-            </a:pPr>
-            <a:endParaRPr lang="it-IT" noProof="0" dirty="0"/>
-          </a:p>
-          <a:p>
-            <a:pPr marL="0" indent="0">
-              <a:buNone/>
-            </a:pPr>
-            <a:r>
-              <a:rPr lang="it-IT" noProof="0" dirty="0"/>
-              <a:t>Creiamo file .ENV</a:t>
+            <a:r>
+              <a:rPr lang="it-IT" noProof="0" dirty="0"/>
+              <a:t>Esempio migliore:</a:t>
+            </a:r>
+          </a:p>
+          <a:p>
+            <a:pPr marL="0" indent="0">
+              <a:buNone/>
+            </a:pPr>
+            <a:r>
+              <a:rPr lang="it-IT" noProof="0" dirty="0">
+                <a:latin typeface="Consolas" panose="020B0609020204030204" pitchFamily="49" charset="0"/>
+              </a:rPr>
+              <a:t>Scrivi una funzione Python che legga un file CSV usando pandas</a:t>
+            </a:r>
+          </a:p>
+          <a:p>
+            <a:pPr marL="0" indent="0">
+              <a:buNone/>
+            </a:pPr>
+            <a:endParaRPr lang="it-IT" b="1" noProof="0" dirty="0"/>
+          </a:p>
+          <a:p>
+            <a:pPr marL="0" indent="0">
+              <a:buNone/>
+            </a:pPr>
+            <a:r>
+              <a:rPr lang="it-IT" b="1" noProof="0" dirty="0"/>
+              <a:t>Temperature</a:t>
+            </a:r>
+          </a:p>
+          <a:p>
+            <a:pPr marL="0" indent="0">
+              <a:buNone/>
+            </a:pPr>
+            <a:r>
+              <a:rPr lang="it-IT" noProof="0" dirty="0"/>
+              <a:t>Controlla la creatività del modello.</a:t>
+            </a:r>
+          </a:p>
+          <a:p>
+            <a:pPr marL="0" indent="0">
+              <a:buNone/>
+            </a:pPr>
+            <a:r>
+              <a:rPr lang="it-IT" noProof="0" dirty="0"/>
+              <a:t>	0 → risposte precise </a:t>
+            </a:r>
+          </a:p>
+          <a:p>
+            <a:pPr marL="0" indent="0">
+              <a:buNone/>
+            </a:pPr>
+            <a:r>
+              <a:rPr lang="it-IT" noProof="0" dirty="0"/>
+              <a:t>	1 → risposte creative </a:t>
+            </a:r>
+          </a:p>
+          <a:p>
+            <a:pPr marL="0" indent="0">
+              <a:buNone/>
+            </a:pPr>
+            <a:r>
+              <a:rPr lang="it-IT" b="1" noProof="0" dirty="0"/>
+              <a:t>Max Tokens</a:t>
+            </a:r>
+          </a:p>
+          <a:p>
+            <a:pPr marL="0" indent="0">
+              <a:buNone/>
+            </a:pPr>
+            <a:r>
+              <a:rPr lang="it-IT" noProof="0" dirty="0"/>
+              <a:t>Numero massimo di token generati.</a:t>
             </a:r>
           </a:p>
         </p:txBody>
@@ -5191,7 +5153,7 @@
     </p:spTree>
     <p:extLst>
       <p:ext uri="{BB962C8B-B14F-4D97-AF65-F5344CB8AC3E}">
-        <p14:creationId xmlns:p14="http://schemas.microsoft.com/office/powerpoint/2010/main" val="3962381380"/>
+        <p14:creationId xmlns:p14="http://schemas.microsoft.com/office/powerpoint/2010/main" val="1762387843"/>
       </p:ext>
     </p:extLst>
   </p:cSld>
@@ -5223,7 +5185,7 @@
           <p:cNvPr id="2" name="Title 1">
             <a:extLst>
               <a:ext uri="{FF2B5EF4-FFF2-40B4-BE49-F238E27FC236}">
-                <a16:creationId xmlns:a16="http://schemas.microsoft.com/office/drawing/2014/main" id="{738A7FC1-603F-247E-E169-C4B84006ABA2}"/>
+                <a16:creationId xmlns:a16="http://schemas.microsoft.com/office/drawing/2014/main" id="{35316690-8711-B50B-642F-4F8E6A3A6709}"/>
               </a:ext>
             </a:extLst>
           </p:cNvPr>
@@ -5241,7 +5203,7 @@
           <a:p>
             <a:r>
               <a:rPr lang="it-IT" noProof="0" dirty="0"/>
-              <a:t>base_url</a:t>
+              <a:t>Google AI Studio</a:t>
             </a:r>
           </a:p>
         </p:txBody>
@@ -5251,7 +5213,7 @@
           <p:cNvPr id="3" name="Content Placeholder 2">
             <a:extLst>
               <a:ext uri="{FF2B5EF4-FFF2-40B4-BE49-F238E27FC236}">
-                <a16:creationId xmlns:a16="http://schemas.microsoft.com/office/drawing/2014/main" id="{771F8C49-14E4-1319-670B-183FDA444239}"/>
+                <a16:creationId xmlns:a16="http://schemas.microsoft.com/office/drawing/2014/main" id="{2C261B15-C03E-CCDC-8C51-C50DED6B9A0B}"/>
               </a:ext>
             </a:extLst>
           </p:cNvPr>
@@ -5265,7 +5227,7 @@
         <p:spPr/>
         <p:txBody>
           <a:bodyPr>
-            <a:normAutofit/>
+            <a:normAutofit fontScale="85000" lnSpcReduction="20000"/>
           </a:bodyPr>
           <a:lstStyle/>
           <a:p>
@@ -5273,74 +5235,110 @@
               <a:buNone/>
             </a:pPr>
             <a:r>
-              <a:rPr lang="it-IT" sz="2000" noProof="0" dirty="0"/>
-              <a:t># OpenAI</a:t>
-            </a:r>
-            <a:br>
-              <a:rPr lang="it-IT" sz="2000" noProof="0" dirty="0"/>
-            </a:br>
-            <a:r>
-              <a:rPr lang="it-IT" sz="2000" noProof="0" dirty="0"/>
-              <a:t>base_url="https://api.openai.com/v1"</a:t>
-            </a:r>
-            <a:br>
-              <a:rPr lang="it-IT" sz="2000" noProof="0" dirty="0"/>
-            </a:br>
-            <a:br>
-              <a:rPr lang="it-IT" sz="2000" noProof="0" dirty="0"/>
-            </a:br>
-            <a:r>
-              <a:rPr lang="it-IT" sz="2000" noProof="0" dirty="0"/>
-              <a:t># Groq</a:t>
-            </a:r>
-            <a:br>
-              <a:rPr lang="it-IT" sz="2000" noProof="0" dirty="0"/>
-            </a:br>
-            <a:r>
-              <a:rPr lang="it-IT" sz="2000" noProof="0" dirty="0"/>
-              <a:t>base_url="https://api.groq.com/openai/v1"</a:t>
-            </a:r>
-            <a:br>
-              <a:rPr lang="it-IT" sz="2000" noProof="0" dirty="0"/>
-            </a:br>
-            <a:br>
-              <a:rPr lang="it-IT" sz="2000" noProof="0" dirty="0"/>
-            </a:br>
-            <a:r>
-              <a:rPr lang="it-IT" sz="2000" noProof="0" dirty="0"/>
-              <a:t># Gemini</a:t>
-            </a:r>
-            <a:br>
-              <a:rPr lang="it-IT" sz="2000" noProof="0" dirty="0"/>
-            </a:br>
-            <a:r>
-              <a:rPr lang="it-IT" sz="2000" noProof="0" dirty="0"/>
-              <a:t>base_url="https://generativelanguage.googleapis.com/v1beta/openai/"</a:t>
-            </a:r>
-            <a:br>
-              <a:rPr lang="it-IT" sz="2000" noProof="0" dirty="0"/>
-            </a:br>
-            <a:br>
-              <a:rPr lang="it-IT" sz="2000" noProof="0" dirty="0"/>
-            </a:br>
-            <a:r>
-              <a:rPr lang="it-IT" sz="2000" noProof="0" dirty="0"/>
-              <a:t># OpenRouter</a:t>
-            </a:r>
-            <a:br>
-              <a:rPr lang="it-IT" sz="2000" noProof="0" dirty="0"/>
-            </a:br>
-            <a:r>
-              <a:rPr lang="it-IT" sz="2000" noProof="0" dirty="0"/>
-              <a:t>base_url="https://openrouter.ai/api/v1"</a:t>
-            </a:r>
+              <a:rPr lang="it-IT" noProof="0" dirty="0">
+                <a:hlinkClick r:id="rId2"/>
+              </a:rPr>
+              <a:t>https://aistudio.google.com</a:t>
+            </a:r>
+            <a:endParaRPr lang="it-IT" noProof="0" dirty="0"/>
+          </a:p>
+          <a:p>
+            <a:pPr marL="0" indent="0">
+              <a:buNone/>
+            </a:pPr>
+            <a:endParaRPr lang="it-IT" dirty="0"/>
+          </a:p>
+          <a:p>
+            <a:pPr marL="0" indent="0">
+              <a:buNone/>
+            </a:pPr>
+            <a:r>
+              <a:rPr lang="it-IT" dirty="0"/>
+              <a:t>Creiamo file .env</a:t>
+            </a:r>
+          </a:p>
+          <a:p>
+            <a:pPr marL="0" indent="0">
+              <a:buNone/>
+            </a:pPr>
+            <a:r>
+              <a:rPr lang="en-US" dirty="0"/>
+              <a:t>API_KEY=………………..</a:t>
+            </a:r>
+          </a:p>
+          <a:p>
+            <a:pPr marL="0" indent="0">
+              <a:buNone/>
+            </a:pPr>
+            <a:endParaRPr lang="it-IT" noProof="0" dirty="0"/>
+          </a:p>
+          <a:p>
+            <a:pPr marL="0" indent="0">
+              <a:buNone/>
+            </a:pPr>
+            <a:endParaRPr lang="it-IT" noProof="0" dirty="0"/>
+          </a:p>
+          <a:p>
+            <a:pPr marL="0" indent="0">
+              <a:buNone/>
+            </a:pPr>
+            <a:endParaRPr lang="it-IT" noProof="0" dirty="0"/>
+          </a:p>
+          <a:p>
+            <a:pPr marL="0" indent="0">
+              <a:buNone/>
+            </a:pPr>
+            <a:r>
+              <a:rPr lang="it-IT" noProof="0"/>
+              <a:t>Per installare i componenti </a:t>
+            </a:r>
+            <a:endParaRPr lang="it-IT" noProof="0" dirty="0"/>
+          </a:p>
+          <a:p>
+            <a:pPr marL="0" indent="0">
+              <a:buNone/>
+            </a:pPr>
+            <a:r>
+              <a:rPr lang="it-IT" noProof="0" dirty="0"/>
+              <a:t>#pip install openai</a:t>
+            </a:r>
+          </a:p>
+          <a:p>
+            <a:pPr marL="0" indent="0">
+              <a:buNone/>
+            </a:pPr>
+            <a:r>
+              <a:rPr lang="it-IT" noProof="0" dirty="0"/>
+              <a:t>#pip install google-generativeai</a:t>
+            </a:r>
+          </a:p>
+          <a:p>
+            <a:pPr marL="0" indent="0">
+              <a:buNone/>
+            </a:pPr>
+            <a:r>
+              <a:rPr lang="it-IT" noProof="0" dirty="0"/>
+              <a:t>#pip install python-dotenv</a:t>
+            </a:r>
+          </a:p>
+          <a:p>
+            <a:pPr marL="0" indent="0">
+              <a:buNone/>
+            </a:pPr>
+            <a:endParaRPr lang="it-IT" noProof="0" dirty="0"/>
+          </a:p>
+          <a:p>
+            <a:pPr marL="0" indent="0">
+              <a:buNone/>
+            </a:pPr>
+            <a:endParaRPr lang="it-IT" noProof="0" dirty="0"/>
           </a:p>
         </p:txBody>
       </p:sp>
     </p:spTree>
     <p:extLst>
       <p:ext uri="{BB962C8B-B14F-4D97-AF65-F5344CB8AC3E}">
-        <p14:creationId xmlns:p14="http://schemas.microsoft.com/office/powerpoint/2010/main" val="819659442"/>
+        <p14:creationId xmlns:p14="http://schemas.microsoft.com/office/powerpoint/2010/main" val="3962381380"/>
       </p:ext>
     </p:extLst>
   </p:cSld>
@@ -5372,7 +5370,7 @@
           <p:cNvPr id="2" name="Title 1">
             <a:extLst>
               <a:ext uri="{FF2B5EF4-FFF2-40B4-BE49-F238E27FC236}">
-                <a16:creationId xmlns:a16="http://schemas.microsoft.com/office/drawing/2014/main" id="{DF76EFC1-4D98-4E1E-424D-EC4617223C78}"/>
+                <a16:creationId xmlns:a16="http://schemas.microsoft.com/office/drawing/2014/main" id="{738A7FC1-603F-247E-E169-C4B84006ABA2}"/>
               </a:ext>
             </a:extLst>
           </p:cNvPr>
@@ -5390,7 +5388,7 @@
           <a:p>
             <a:r>
               <a:rPr lang="it-IT" noProof="0" dirty="0"/>
-              <a:t>Limiti degli LLM</a:t>
+              <a:t>base_url</a:t>
             </a:r>
           </a:p>
         </p:txBody>
@@ -5400,7 +5398,7 @@
           <p:cNvPr id="3" name="Content Placeholder 2">
             <a:extLst>
               <a:ext uri="{FF2B5EF4-FFF2-40B4-BE49-F238E27FC236}">
-                <a16:creationId xmlns:a16="http://schemas.microsoft.com/office/drawing/2014/main" id="{0FCA317D-C329-8BC4-940E-A71B869BC415}"/>
+                <a16:creationId xmlns:a16="http://schemas.microsoft.com/office/drawing/2014/main" id="{771F8C49-14E4-1319-670B-183FDA444239}"/>
               </a:ext>
             </a:extLst>
           </p:cNvPr>
@@ -5413,69 +5411,83 @@
         </p:nvSpPr>
         <p:spPr/>
         <p:txBody>
-          <a:bodyPr/>
-          <a:lstStyle/>
-          <a:p>
-            <a:pPr marL="0" indent="0">
-              <a:buNone/>
-            </a:pPr>
-            <a:r>
-              <a:rPr lang="it-IT" b="1" noProof="0" dirty="0"/>
-              <a:t>Problemi principali</a:t>
-            </a:r>
-          </a:p>
-          <a:p>
-            <a:r>
-              <a:rPr lang="it-IT" noProof="0" dirty="0"/>
-              <a:t>informazioni obsolete </a:t>
-            </a:r>
-          </a:p>
-          <a:p>
-            <a:r>
-              <a:rPr lang="it-IT" noProof="0" dirty="0"/>
-              <a:t>allucinazioni </a:t>
-            </a:r>
-          </a:p>
-          <a:p>
-            <a:r>
-              <a:rPr lang="it-IT" noProof="0" dirty="0"/>
-              <a:t>nessuna conoscenza privata </a:t>
-            </a:r>
-          </a:p>
-          <a:p>
-            <a:r>
-              <a:rPr lang="it-IT" noProof="0" dirty="0"/>
-              <a:t>contesto limitato </a:t>
-            </a:r>
-          </a:p>
-          <a:p>
-            <a:pPr marL="0" indent="0">
-              <a:buNone/>
-            </a:pPr>
-            <a:endParaRPr lang="it-IT" noProof="0" dirty="0"/>
-          </a:p>
-          <a:p>
-            <a:pPr marL="0" indent="0">
-              <a:buNone/>
-            </a:pPr>
-            <a:r>
-              <a:rPr lang="it-IT" noProof="0" dirty="0"/>
-              <a:t>Soluzione moderna: </a:t>
-            </a:r>
-            <a:r>
-              <a:rPr lang="it-IT" b="1" noProof="0" dirty="0"/>
-              <a:t>RAG</a:t>
-            </a:r>
-          </a:p>
-          <a:p>
-            <a:endParaRPr lang="it-IT" noProof="0" dirty="0"/>
+          <a:bodyPr>
+            <a:normAutofit/>
+          </a:bodyPr>
+          <a:lstStyle/>
+          <a:p>
+            <a:pPr marL="0" indent="0">
+              <a:buNone/>
+            </a:pPr>
+            <a:r>
+              <a:rPr lang="it-IT" sz="2000" noProof="0" dirty="0"/>
+              <a:t># OpenAI</a:t>
+            </a:r>
+            <a:br>
+              <a:rPr lang="it-IT" sz="2000" noProof="0" dirty="0"/>
+            </a:br>
+            <a:r>
+              <a:rPr lang="it-IT" sz="2000" noProof="0" dirty="0"/>
+              <a:t>base_url="https://api.openai.com/v1"</a:t>
+            </a:r>
+            <a:br>
+              <a:rPr lang="it-IT" sz="2000" noProof="0" dirty="0"/>
+            </a:br>
+            <a:br>
+              <a:rPr lang="it-IT" sz="2000" noProof="0" dirty="0"/>
+            </a:br>
+            <a:r>
+              <a:rPr lang="it-IT" sz="2000" noProof="0" dirty="0"/>
+              <a:t># Groq</a:t>
+            </a:r>
+            <a:br>
+              <a:rPr lang="it-IT" sz="2000" noProof="0" dirty="0"/>
+            </a:br>
+            <a:r>
+              <a:rPr lang="it-IT" sz="2000" noProof="0" dirty="0"/>
+              <a:t>base_url="https://api.groq.com/openai/v1"</a:t>
+            </a:r>
+            <a:br>
+              <a:rPr lang="it-IT" sz="2000" noProof="0" dirty="0"/>
+            </a:br>
+            <a:br>
+              <a:rPr lang="it-IT" sz="2000" noProof="0" dirty="0"/>
+            </a:br>
+            <a:r>
+              <a:rPr lang="it-IT" sz="2000" noProof="0" dirty="0"/>
+              <a:t># Gemini</a:t>
+            </a:r>
+            <a:br>
+              <a:rPr lang="it-IT" sz="2000" noProof="0" dirty="0"/>
+            </a:br>
+            <a:r>
+              <a:rPr lang="it-IT" sz="2000" noProof="0" dirty="0"/>
+              <a:t>base_url="https://generativelanguage.googleapis.com/v1beta/openai/"</a:t>
+            </a:r>
+            <a:br>
+              <a:rPr lang="it-IT" sz="2000" noProof="0" dirty="0"/>
+            </a:br>
+            <a:br>
+              <a:rPr lang="it-IT" sz="2000" noProof="0" dirty="0"/>
+            </a:br>
+            <a:r>
+              <a:rPr lang="it-IT" sz="2000" noProof="0" dirty="0"/>
+              <a:t># OpenRouter</a:t>
+            </a:r>
+            <a:br>
+              <a:rPr lang="it-IT" sz="2000" noProof="0" dirty="0"/>
+            </a:br>
+            <a:r>
+              <a:rPr lang="it-IT" sz="2000" noProof="0" dirty="0"/>
+              <a:t>base_url="https://openrouter.ai/api/v1"</a:t>
+            </a:r>
           </a:p>
         </p:txBody>
       </p:sp>
     </p:spTree>
     <p:extLst>
       <p:ext uri="{BB962C8B-B14F-4D97-AF65-F5344CB8AC3E}">
-        <p14:creationId xmlns:p14="http://schemas.microsoft.com/office/powerpoint/2010/main" val="979821371"/>
+        <p14:creationId xmlns:p14="http://schemas.microsoft.com/office/powerpoint/2010/main" val="819659442"/>
       </p:ext>
     </p:extLst>
   </p:cSld>
@@ -5507,6 +5519,141 @@
           <p:cNvPr id="2" name="Title 1">
             <a:extLst>
               <a:ext uri="{FF2B5EF4-FFF2-40B4-BE49-F238E27FC236}">
+                <a16:creationId xmlns:a16="http://schemas.microsoft.com/office/drawing/2014/main" id="{DF76EFC1-4D98-4E1E-424D-EC4617223C78}"/>
+              </a:ext>
+            </a:extLst>
+          </p:cNvPr>
+          <p:cNvSpPr>
+            <a:spLocks noGrp="1"/>
+          </p:cNvSpPr>
+          <p:nvPr>
+            <p:ph type="title"/>
+          </p:nvPr>
+        </p:nvSpPr>
+        <p:spPr/>
+        <p:txBody>
+          <a:bodyPr/>
+          <a:lstStyle/>
+          <a:p>
+            <a:r>
+              <a:rPr lang="it-IT" noProof="0" dirty="0"/>
+              <a:t>Limiti degli LLM</a:t>
+            </a:r>
+          </a:p>
+        </p:txBody>
+      </p:sp>
+      <p:sp>
+        <p:nvSpPr>
+          <p:cNvPr id="3" name="Content Placeholder 2">
+            <a:extLst>
+              <a:ext uri="{FF2B5EF4-FFF2-40B4-BE49-F238E27FC236}">
+                <a16:creationId xmlns:a16="http://schemas.microsoft.com/office/drawing/2014/main" id="{0FCA317D-C329-8BC4-940E-A71B869BC415}"/>
+              </a:ext>
+            </a:extLst>
+          </p:cNvPr>
+          <p:cNvSpPr>
+            <a:spLocks noGrp="1"/>
+          </p:cNvSpPr>
+          <p:nvPr>
+            <p:ph idx="1"/>
+          </p:nvPr>
+        </p:nvSpPr>
+        <p:spPr/>
+        <p:txBody>
+          <a:bodyPr/>
+          <a:lstStyle/>
+          <a:p>
+            <a:pPr marL="0" indent="0">
+              <a:buNone/>
+            </a:pPr>
+            <a:r>
+              <a:rPr lang="it-IT" b="1" noProof="0" dirty="0"/>
+              <a:t>Problemi principali</a:t>
+            </a:r>
+          </a:p>
+          <a:p>
+            <a:r>
+              <a:rPr lang="it-IT" noProof="0" dirty="0"/>
+              <a:t>informazioni obsolete </a:t>
+            </a:r>
+          </a:p>
+          <a:p>
+            <a:r>
+              <a:rPr lang="it-IT" noProof="0" dirty="0"/>
+              <a:t>allucinazioni </a:t>
+            </a:r>
+          </a:p>
+          <a:p>
+            <a:r>
+              <a:rPr lang="it-IT" noProof="0" dirty="0"/>
+              <a:t>nessuna conoscenza privata </a:t>
+            </a:r>
+          </a:p>
+          <a:p>
+            <a:r>
+              <a:rPr lang="it-IT" noProof="0" dirty="0"/>
+              <a:t>contesto limitato </a:t>
+            </a:r>
+          </a:p>
+          <a:p>
+            <a:pPr marL="0" indent="0">
+              <a:buNone/>
+            </a:pPr>
+            <a:endParaRPr lang="it-IT" noProof="0" dirty="0"/>
+          </a:p>
+          <a:p>
+            <a:pPr marL="0" indent="0">
+              <a:buNone/>
+            </a:pPr>
+            <a:r>
+              <a:rPr lang="it-IT" noProof="0" dirty="0"/>
+              <a:t>Soluzione moderna: </a:t>
+            </a:r>
+            <a:r>
+              <a:rPr lang="it-IT" b="1" noProof="0" dirty="0"/>
+              <a:t>RAG</a:t>
+            </a:r>
+          </a:p>
+          <a:p>
+            <a:endParaRPr lang="it-IT" noProof="0" dirty="0"/>
+          </a:p>
+        </p:txBody>
+      </p:sp>
+    </p:spTree>
+    <p:extLst>
+      <p:ext uri="{BB962C8B-B14F-4D97-AF65-F5344CB8AC3E}">
+        <p14:creationId xmlns:p14="http://schemas.microsoft.com/office/powerpoint/2010/main" val="979821371"/>
+      </p:ext>
+    </p:extLst>
+  </p:cSld>
+  <p:clrMapOvr>
+    <a:masterClrMapping/>
+  </p:clrMapOvr>
+</p:sld>
+</file>
+
+<file path=ppt/slides/slide18.xml><?xml version="1.0" encoding="utf-8"?>
+<p:sld xmlns:a="http://schemas.openxmlformats.org/drawingml/2006/main" xmlns:r="http://schemas.openxmlformats.org/officeDocument/2006/relationships" xmlns:p="http://schemas.openxmlformats.org/presentationml/2006/main">
+  <p:cSld>
+    <p:spTree>
+      <p:nvGrpSpPr>
+        <p:cNvPr id="1" name=""/>
+        <p:cNvGrpSpPr/>
+        <p:nvPr/>
+      </p:nvGrpSpPr>
+      <p:grpSpPr>
+        <a:xfrm>
+          <a:off x="0" y="0"/>
+          <a:ext cx="0" cy="0"/>
+          <a:chOff x="0" y="0"/>
+          <a:chExt cx="0" cy="0"/>
+        </a:xfrm>
+      </p:grpSpPr>
+      <p:sp>
+        <p:nvSpPr>
+          <p:cNvPr id="2" name="Title 1">
+            <a:extLst>
+              <a:ext uri="{FF2B5EF4-FFF2-40B4-BE49-F238E27FC236}">
                 <a16:creationId xmlns:a16="http://schemas.microsoft.com/office/drawing/2014/main" id="{952557A1-78A2-A110-34AF-D103054D313B}"/>
               </a:ext>
             </a:extLst>
@@ -5714,7 +5861,7 @@
 </p:sld>
 </file>
 
-<file path=ppt/slides/slide18.xml><?xml version="1.0" encoding="utf-8"?>
+<file path=ppt/slides/slide19.xml><?xml version="1.0" encoding="utf-8"?>
 <p:sld xmlns:a="http://schemas.openxmlformats.org/drawingml/2006/main" xmlns:r="http://schemas.openxmlformats.org/officeDocument/2006/relationships" xmlns:p="http://schemas.openxmlformats.org/presentationml/2006/main">
   <p:cSld>
     <p:spTree>
@@ -5915,7 +6062,197 @@
 </p:sld>
 </file>
 
-<file path=ppt/slides/slide19.xml><?xml version="1.0" encoding="utf-8"?>
+<file path=ppt/slides/slide2.xml><?xml version="1.0" encoding="utf-8"?>
+<p:sld xmlns:a="http://schemas.openxmlformats.org/drawingml/2006/main" xmlns:r="http://schemas.openxmlformats.org/officeDocument/2006/relationships" xmlns:p="http://schemas.openxmlformats.org/presentationml/2006/main">
+  <p:cSld>
+    <p:spTree>
+      <p:nvGrpSpPr>
+        <p:cNvPr id="1" name=""/>
+        <p:cNvGrpSpPr/>
+        <p:nvPr/>
+      </p:nvGrpSpPr>
+      <p:grpSpPr>
+        <a:xfrm>
+          <a:off x="0" y="0"/>
+          <a:ext cx="0" cy="0"/>
+          <a:chOff x="0" y="0"/>
+          <a:chExt cx="0" cy="0"/>
+        </a:xfrm>
+      </p:grpSpPr>
+      <p:sp>
+        <p:nvSpPr>
+          <p:cNvPr id="2" name="Title 1">
+            <a:extLst>
+              <a:ext uri="{FF2B5EF4-FFF2-40B4-BE49-F238E27FC236}">
+                <a16:creationId xmlns:a16="http://schemas.microsoft.com/office/drawing/2014/main" id="{31C49063-7B56-855F-2725-90E70E5C0A88}"/>
+              </a:ext>
+            </a:extLst>
+          </p:cNvPr>
+          <p:cNvSpPr>
+            <a:spLocks noGrp="1"/>
+          </p:cNvSpPr>
+          <p:nvPr>
+            <p:ph type="title"/>
+          </p:nvPr>
+        </p:nvSpPr>
+        <p:spPr/>
+        <p:txBody>
+          <a:bodyPr/>
+          <a:lstStyle/>
+          <a:p>
+            <a:r>
+              <a:rPr lang="it-IT" noProof="0" dirty="0"/>
+              <a:t>Docker</a:t>
+            </a:r>
+          </a:p>
+        </p:txBody>
+      </p:sp>
+      <p:sp>
+        <p:nvSpPr>
+          <p:cNvPr id="3" name="Content Placeholder 2">
+            <a:extLst>
+              <a:ext uri="{FF2B5EF4-FFF2-40B4-BE49-F238E27FC236}">
+                <a16:creationId xmlns:a16="http://schemas.microsoft.com/office/drawing/2014/main" id="{B133FAB7-B93B-F06C-82CB-E54C7BED878B}"/>
+              </a:ext>
+            </a:extLst>
+          </p:cNvPr>
+          <p:cNvSpPr>
+            <a:spLocks noGrp="1"/>
+          </p:cNvSpPr>
+          <p:nvPr>
+            <p:ph idx="1"/>
+          </p:nvPr>
+        </p:nvSpPr>
+        <p:spPr/>
+        <p:txBody>
+          <a:bodyPr>
+            <a:normAutofit fontScale="85000" lnSpcReduction="20000"/>
+          </a:bodyPr>
+          <a:lstStyle/>
+          <a:p>
+            <a:pPr marL="0" indent="0">
+              <a:buNone/>
+            </a:pPr>
+            <a:r>
+              <a:rPr lang="it-IT" noProof="0" dirty="0"/>
+              <a:t>Docker permette di creare container isolati.</a:t>
+            </a:r>
+          </a:p>
+          <a:p>
+            <a:pPr marL="0" indent="0">
+              <a:buNone/>
+            </a:pPr>
+            <a:r>
+              <a:rPr lang="it-IT" noProof="0" dirty="0"/>
+              <a:t>Un container contiene:</a:t>
+            </a:r>
+          </a:p>
+          <a:p>
+            <a:r>
+              <a:rPr lang="it-IT" noProof="0" dirty="0"/>
+              <a:t>codice </a:t>
+            </a:r>
+          </a:p>
+          <a:p>
+            <a:r>
+              <a:rPr lang="it-IT" noProof="0" dirty="0"/>
+              <a:t>dipendenze </a:t>
+            </a:r>
+          </a:p>
+          <a:p>
+            <a:r>
+              <a:rPr lang="it-IT" noProof="0" dirty="0"/>
+              <a:t>librerie </a:t>
+            </a:r>
+          </a:p>
+          <a:p>
+            <a:r>
+              <a:rPr lang="it-IT" noProof="0" dirty="0"/>
+              <a:t>configurazioni </a:t>
+            </a:r>
+          </a:p>
+          <a:p>
+            <a:pPr marL="0" indent="0">
+              <a:buNone/>
+            </a:pPr>
+            <a:endParaRPr lang="it-IT" noProof="0" dirty="0"/>
+          </a:p>
+          <a:p>
+            <a:pPr marL="0" indent="0">
+              <a:buNone/>
+            </a:pPr>
+            <a:r>
+              <a:rPr lang="it-IT" noProof="0" dirty="0"/>
+              <a:t>Vantaggi:</a:t>
+            </a:r>
+          </a:p>
+          <a:p>
+            <a:r>
+              <a:rPr lang="it-IT" noProof="0" dirty="0"/>
+              <a:t>portabilità </a:t>
+            </a:r>
+          </a:p>
+          <a:p>
+            <a:r>
+              <a:rPr lang="it-IT" noProof="0" dirty="0"/>
+              <a:t>semplicità </a:t>
+            </a:r>
+          </a:p>
+          <a:p>
+            <a:r>
+              <a:rPr lang="it-IT" noProof="0" dirty="0"/>
+              <a:t>deployment rapido</a:t>
+            </a:r>
+          </a:p>
+          <a:p>
+            <a:endParaRPr lang="it-IT" noProof="0" dirty="0"/>
+          </a:p>
+        </p:txBody>
+      </p:sp>
+      <p:pic>
+        <p:nvPicPr>
+          <p:cNvPr id="5" name="Picture 4">
+            <a:extLst>
+              <a:ext uri="{FF2B5EF4-FFF2-40B4-BE49-F238E27FC236}">
+                <a16:creationId xmlns:a16="http://schemas.microsoft.com/office/drawing/2014/main" id="{260204D9-CD87-D25E-75D5-83757164CF4F}"/>
+              </a:ext>
+            </a:extLst>
+          </p:cNvPr>
+          <p:cNvPicPr>
+            <a:picLocks noChangeAspect="1"/>
+          </p:cNvPicPr>
+          <p:nvPr/>
+        </p:nvPicPr>
+        <p:blipFill>
+          <a:blip r:embed="rId2"/>
+          <a:stretch>
+            <a:fillRect/>
+          </a:stretch>
+        </p:blipFill>
+        <p:spPr>
+          <a:xfrm>
+            <a:off x="9460943" y="681037"/>
+            <a:ext cx="1664257" cy="1513509"/>
+          </a:xfrm>
+          <a:prstGeom prst="rect">
+            <a:avLst/>
+          </a:prstGeom>
+        </p:spPr>
+      </p:pic>
+    </p:spTree>
+    <p:extLst>
+      <p:ext uri="{BB962C8B-B14F-4D97-AF65-F5344CB8AC3E}">
+        <p14:creationId xmlns:p14="http://schemas.microsoft.com/office/powerpoint/2010/main" val="4235319617"/>
+      </p:ext>
+    </p:extLst>
+  </p:cSld>
+  <p:clrMapOvr>
+    <a:masterClrMapping/>
+  </p:clrMapOvr>
+</p:sld>
+</file>
+
+<file path=ppt/slides/slide20.xml><?xml version="1.0" encoding="utf-8"?>
 <p:sld xmlns:a="http://schemas.openxmlformats.org/drawingml/2006/main" xmlns:r="http://schemas.openxmlformats.org/officeDocument/2006/relationships" xmlns:p="http://schemas.openxmlformats.org/presentationml/2006/main">
   <p:cSld>
     <p:spTree>
@@ -6140,197 +6477,7 @@
 </p:sld>
 </file>
 
-<file path=ppt/slides/slide2.xml><?xml version="1.0" encoding="utf-8"?>
-<p:sld xmlns:a="http://schemas.openxmlformats.org/drawingml/2006/main" xmlns:r="http://schemas.openxmlformats.org/officeDocument/2006/relationships" xmlns:p="http://schemas.openxmlformats.org/presentationml/2006/main">
-  <p:cSld>
-    <p:spTree>
-      <p:nvGrpSpPr>
-        <p:cNvPr id="1" name=""/>
-        <p:cNvGrpSpPr/>
-        <p:nvPr/>
-      </p:nvGrpSpPr>
-      <p:grpSpPr>
-        <a:xfrm>
-          <a:off x="0" y="0"/>
-          <a:ext cx="0" cy="0"/>
-          <a:chOff x="0" y="0"/>
-          <a:chExt cx="0" cy="0"/>
-        </a:xfrm>
-      </p:grpSpPr>
-      <p:sp>
-        <p:nvSpPr>
-          <p:cNvPr id="2" name="Title 1">
-            <a:extLst>
-              <a:ext uri="{FF2B5EF4-FFF2-40B4-BE49-F238E27FC236}">
-                <a16:creationId xmlns:a16="http://schemas.microsoft.com/office/drawing/2014/main" id="{31C49063-7B56-855F-2725-90E70E5C0A88}"/>
-              </a:ext>
-            </a:extLst>
-          </p:cNvPr>
-          <p:cNvSpPr>
-            <a:spLocks noGrp="1"/>
-          </p:cNvSpPr>
-          <p:nvPr>
-            <p:ph type="title"/>
-          </p:nvPr>
-        </p:nvSpPr>
-        <p:spPr/>
-        <p:txBody>
-          <a:bodyPr/>
-          <a:lstStyle/>
-          <a:p>
-            <a:r>
-              <a:rPr lang="it-IT" noProof="0" dirty="0"/>
-              <a:t>Docker</a:t>
-            </a:r>
-          </a:p>
-        </p:txBody>
-      </p:sp>
-      <p:sp>
-        <p:nvSpPr>
-          <p:cNvPr id="3" name="Content Placeholder 2">
-            <a:extLst>
-              <a:ext uri="{FF2B5EF4-FFF2-40B4-BE49-F238E27FC236}">
-                <a16:creationId xmlns:a16="http://schemas.microsoft.com/office/drawing/2014/main" id="{B133FAB7-B93B-F06C-82CB-E54C7BED878B}"/>
-              </a:ext>
-            </a:extLst>
-          </p:cNvPr>
-          <p:cNvSpPr>
-            <a:spLocks noGrp="1"/>
-          </p:cNvSpPr>
-          <p:nvPr>
-            <p:ph idx="1"/>
-          </p:nvPr>
-        </p:nvSpPr>
-        <p:spPr/>
-        <p:txBody>
-          <a:bodyPr>
-            <a:normAutofit fontScale="85000" lnSpcReduction="20000"/>
-          </a:bodyPr>
-          <a:lstStyle/>
-          <a:p>
-            <a:pPr marL="0" indent="0">
-              <a:buNone/>
-            </a:pPr>
-            <a:r>
-              <a:rPr lang="it-IT" noProof="0" dirty="0"/>
-              <a:t>Docker permette di creare container isolati.</a:t>
-            </a:r>
-          </a:p>
-          <a:p>
-            <a:pPr marL="0" indent="0">
-              <a:buNone/>
-            </a:pPr>
-            <a:r>
-              <a:rPr lang="it-IT" noProof="0" dirty="0"/>
-              <a:t>Un container contiene:</a:t>
-            </a:r>
-          </a:p>
-          <a:p>
-            <a:r>
-              <a:rPr lang="it-IT" noProof="0" dirty="0"/>
-              <a:t>codice </a:t>
-            </a:r>
-          </a:p>
-          <a:p>
-            <a:r>
-              <a:rPr lang="it-IT" noProof="0" dirty="0"/>
-              <a:t>dipendenze </a:t>
-            </a:r>
-          </a:p>
-          <a:p>
-            <a:r>
-              <a:rPr lang="it-IT" noProof="0" dirty="0"/>
-              <a:t>librerie </a:t>
-            </a:r>
-          </a:p>
-          <a:p>
-            <a:r>
-              <a:rPr lang="it-IT" noProof="0" dirty="0"/>
-              <a:t>configurazioni </a:t>
-            </a:r>
-          </a:p>
-          <a:p>
-            <a:pPr marL="0" indent="0">
-              <a:buNone/>
-            </a:pPr>
-            <a:endParaRPr lang="it-IT" noProof="0" dirty="0"/>
-          </a:p>
-          <a:p>
-            <a:pPr marL="0" indent="0">
-              <a:buNone/>
-            </a:pPr>
-            <a:r>
-              <a:rPr lang="it-IT" noProof="0" dirty="0"/>
-              <a:t>Vantaggi:</a:t>
-            </a:r>
-          </a:p>
-          <a:p>
-            <a:r>
-              <a:rPr lang="it-IT" noProof="0" dirty="0"/>
-              <a:t>portabilità </a:t>
-            </a:r>
-          </a:p>
-          <a:p>
-            <a:r>
-              <a:rPr lang="it-IT" noProof="0" dirty="0"/>
-              <a:t>semplicità </a:t>
-            </a:r>
-          </a:p>
-          <a:p>
-            <a:r>
-              <a:rPr lang="it-IT" noProof="0" dirty="0"/>
-              <a:t>deployment rapido</a:t>
-            </a:r>
-          </a:p>
-          <a:p>
-            <a:endParaRPr lang="it-IT" noProof="0" dirty="0"/>
-          </a:p>
-        </p:txBody>
-      </p:sp>
-      <p:pic>
-        <p:nvPicPr>
-          <p:cNvPr id="5" name="Picture 4">
-            <a:extLst>
-              <a:ext uri="{FF2B5EF4-FFF2-40B4-BE49-F238E27FC236}">
-                <a16:creationId xmlns:a16="http://schemas.microsoft.com/office/drawing/2014/main" id="{260204D9-CD87-D25E-75D5-83757164CF4F}"/>
-              </a:ext>
-            </a:extLst>
-          </p:cNvPr>
-          <p:cNvPicPr>
-            <a:picLocks noChangeAspect="1"/>
-          </p:cNvPicPr>
-          <p:nvPr/>
-        </p:nvPicPr>
-        <p:blipFill>
-          <a:blip r:embed="rId2"/>
-          <a:stretch>
-            <a:fillRect/>
-          </a:stretch>
-        </p:blipFill>
-        <p:spPr>
-          <a:xfrm>
-            <a:off x="9460943" y="681037"/>
-            <a:ext cx="1664257" cy="1513509"/>
-          </a:xfrm>
-          <a:prstGeom prst="rect">
-            <a:avLst/>
-          </a:prstGeom>
-        </p:spPr>
-      </p:pic>
-    </p:spTree>
-    <p:extLst>
-      <p:ext uri="{BB962C8B-B14F-4D97-AF65-F5344CB8AC3E}">
-        <p14:creationId xmlns:p14="http://schemas.microsoft.com/office/powerpoint/2010/main" val="4235319617"/>
-      </p:ext>
-    </p:extLst>
-  </p:cSld>
-  <p:clrMapOvr>
-    <a:masterClrMapping/>
-  </p:clrMapOvr>
-</p:sld>
-</file>
-
-<file path=ppt/slides/slide20.xml><?xml version="1.0" encoding="utf-8"?>
+<file path=ppt/slides/slide21.xml><?xml version="1.0" encoding="utf-8"?>
 <p:sld xmlns:a="http://schemas.openxmlformats.org/drawingml/2006/main" xmlns:r="http://schemas.openxmlformats.org/officeDocument/2006/relationships" xmlns:p="http://schemas.openxmlformats.org/presentationml/2006/main">
   <p:cSld>
     <p:spTree>
@@ -6515,7 +6662,7 @@
 </p:sld>
 </file>
 
-<file path=ppt/slides/slide21.xml><?xml version="1.0" encoding="utf-8"?>
+<file path=ppt/slides/slide22.xml><?xml version="1.0" encoding="utf-8"?>
 <p:sld xmlns:a="http://schemas.openxmlformats.org/drawingml/2006/main" xmlns:r="http://schemas.openxmlformats.org/officeDocument/2006/relationships" xmlns:p="http://schemas.openxmlformats.org/presentationml/2006/main">
   <p:cSld>
     <p:spTree>
@@ -6775,7 +6922,7 @@
 </p:sld>
 </file>
 
-<file path=ppt/slides/slide22.xml><?xml version="1.0" encoding="utf-8"?>
+<file path=ppt/slides/slide23.xml><?xml version="1.0" encoding="utf-8"?>
 <p:sld xmlns:a="http://schemas.openxmlformats.org/drawingml/2006/main" xmlns:r="http://schemas.openxmlformats.org/officeDocument/2006/relationships" xmlns:p="http://schemas.openxmlformats.org/presentationml/2006/main">
   <p:cSld>
     <p:spTree>
@@ -6869,7 +7016,7 @@
 </p:sld>
 </file>
 
-<file path=ppt/slides/slide23.xml><?xml version="1.0" encoding="utf-8"?>
+<file path=ppt/slides/slide24.xml><?xml version="1.0" encoding="utf-8"?>
 <p:sld xmlns:a="http://schemas.openxmlformats.org/drawingml/2006/main" xmlns:r="http://schemas.openxmlformats.org/officeDocument/2006/relationships" xmlns:p="http://schemas.openxmlformats.org/presentationml/2006/main">
   <p:cSld>
     <p:spTree>
@@ -7860,6 +8007,96 @@
           <p:cNvPr id="2" name="Title 1">
             <a:extLst>
               <a:ext uri="{FF2B5EF4-FFF2-40B4-BE49-F238E27FC236}">
+                <a16:creationId xmlns:a16="http://schemas.microsoft.com/office/drawing/2014/main" id="{78692E1C-8B59-EBAF-6759-93E9E3C1A0CC}"/>
+              </a:ext>
+            </a:extLst>
+          </p:cNvPr>
+          <p:cNvSpPr>
+            <a:spLocks noGrp="1"/>
+          </p:cNvSpPr>
+          <p:nvPr>
+            <p:ph type="title"/>
+          </p:nvPr>
+        </p:nvSpPr>
+        <p:spPr/>
+        <p:txBody>
+          <a:bodyPr/>
+          <a:lstStyle/>
+          <a:p>
+            <a:r>
+              <a:rPr lang="en-US" dirty="0"/>
+              <a:t>Pausa</a:t>
+            </a:r>
+          </a:p>
+        </p:txBody>
+      </p:sp>
+      <p:sp>
+        <p:nvSpPr>
+          <p:cNvPr id="3" name="Content Placeholder 2">
+            <a:extLst>
+              <a:ext uri="{FF2B5EF4-FFF2-40B4-BE49-F238E27FC236}">
+                <a16:creationId xmlns:a16="http://schemas.microsoft.com/office/drawing/2014/main" id="{0B52CBA7-1CDB-CD06-5B71-13CF3C38820F}"/>
+              </a:ext>
+            </a:extLst>
+          </p:cNvPr>
+          <p:cNvSpPr>
+            <a:spLocks noGrp="1"/>
+          </p:cNvSpPr>
+          <p:nvPr>
+            <p:ph idx="1"/>
+          </p:nvPr>
+        </p:nvSpPr>
+        <p:spPr/>
+        <p:txBody>
+          <a:bodyPr/>
+          <a:lstStyle/>
+          <a:p>
+            <a:r>
+              <a:rPr lang="en-US" dirty="0" err="1"/>
+              <a:t>Riprendiamo</a:t>
+            </a:r>
+            <a:r>
+              <a:rPr lang="en-US" dirty="0"/>
+              <a:t> alle 11.15</a:t>
+            </a:r>
+          </a:p>
+        </p:txBody>
+      </p:sp>
+    </p:spTree>
+    <p:extLst>
+      <p:ext uri="{BB962C8B-B14F-4D97-AF65-F5344CB8AC3E}">
+        <p14:creationId xmlns:p14="http://schemas.microsoft.com/office/powerpoint/2010/main" val="375987143"/>
+      </p:ext>
+    </p:extLst>
+  </p:cSld>
+  <p:clrMapOvr>
+    <a:masterClrMapping/>
+  </p:clrMapOvr>
+</p:sld>
+</file>
+
+<file path=ppt/slides/slide8.xml><?xml version="1.0" encoding="utf-8"?>
+<p:sld xmlns:a="http://schemas.openxmlformats.org/drawingml/2006/main" xmlns:r="http://schemas.openxmlformats.org/officeDocument/2006/relationships" xmlns:p="http://schemas.openxmlformats.org/presentationml/2006/main">
+  <p:cSld>
+    <p:spTree>
+      <p:nvGrpSpPr>
+        <p:cNvPr id="1" name=""/>
+        <p:cNvGrpSpPr/>
+        <p:nvPr/>
+      </p:nvGrpSpPr>
+      <p:grpSpPr>
+        <a:xfrm>
+          <a:off x="0" y="0"/>
+          <a:ext cx="0" cy="0"/>
+          <a:chOff x="0" y="0"/>
+          <a:chExt cx="0" cy="0"/>
+        </a:xfrm>
+      </p:grpSpPr>
+      <p:sp>
+        <p:nvSpPr>
+          <p:cNvPr id="2" name="Title 1">
+            <a:extLst>
+              <a:ext uri="{FF2B5EF4-FFF2-40B4-BE49-F238E27FC236}">
                 <a16:creationId xmlns:a16="http://schemas.microsoft.com/office/drawing/2014/main" id="{EC050790-F501-8C11-90B7-9A05D08E8127}"/>
               </a:ext>
             </a:extLst>
@@ -8056,7 +8293,7 @@
 </p:sld>
 </file>
 
-<file path=ppt/slides/slide8.xml><?xml version="1.0" encoding="utf-8"?>
+<file path=ppt/slides/slide9.xml><?xml version="1.0" encoding="utf-8"?>
 <p:sld xmlns:a="http://schemas.openxmlformats.org/drawingml/2006/main" xmlns:r="http://schemas.openxmlformats.org/officeDocument/2006/relationships" xmlns:p="http://schemas.openxmlformats.org/presentationml/2006/main">
   <p:cSld>
     <p:spTree>
@@ -8618,148 +8855,6 @@
     <p:extLst>
       <p:ext uri="{BB962C8B-B14F-4D97-AF65-F5344CB8AC3E}">
         <p14:creationId xmlns:p14="http://schemas.microsoft.com/office/powerpoint/2010/main" val="1881461928"/>
-      </p:ext>
-    </p:extLst>
-  </p:cSld>
-  <p:clrMapOvr>
-    <a:masterClrMapping/>
-  </p:clrMapOvr>
-</p:sld>
-</file>
-
-<file path=ppt/slides/slide9.xml><?xml version="1.0" encoding="utf-8"?>
-<p:sld xmlns:a="http://schemas.openxmlformats.org/drawingml/2006/main" xmlns:r="http://schemas.openxmlformats.org/officeDocument/2006/relationships" xmlns:p="http://schemas.openxmlformats.org/presentationml/2006/main">
-  <p:cSld>
-    <p:spTree>
-      <p:nvGrpSpPr>
-        <p:cNvPr id="1" name=""/>
-        <p:cNvGrpSpPr/>
-        <p:nvPr/>
-      </p:nvGrpSpPr>
-      <p:grpSpPr>
-        <a:xfrm>
-          <a:off x="0" y="0"/>
-          <a:ext cx="0" cy="0"/>
-          <a:chOff x="0" y="0"/>
-          <a:chExt cx="0" cy="0"/>
-        </a:xfrm>
-      </p:grpSpPr>
-      <p:sp>
-        <p:nvSpPr>
-          <p:cNvPr id="2" name="Title 1">
-            <a:extLst>
-              <a:ext uri="{FF2B5EF4-FFF2-40B4-BE49-F238E27FC236}">
-                <a16:creationId xmlns:a16="http://schemas.microsoft.com/office/drawing/2014/main" id="{4EFB6B44-1D6E-DBE8-9B01-B1983DEE03F1}"/>
-              </a:ext>
-            </a:extLst>
-          </p:cNvPr>
-          <p:cNvSpPr>
-            <a:spLocks noGrp="1"/>
-          </p:cNvSpPr>
-          <p:nvPr>
-            <p:ph type="title"/>
-          </p:nvPr>
-        </p:nvSpPr>
-        <p:spPr/>
-        <p:txBody>
-          <a:bodyPr/>
-          <a:lstStyle/>
-          <a:p>
-            <a:r>
-              <a:rPr lang="it-IT" noProof="0" dirty="0"/>
-              <a:t>Redis</a:t>
-            </a:r>
-          </a:p>
-        </p:txBody>
-      </p:sp>
-      <p:sp>
-        <p:nvSpPr>
-          <p:cNvPr id="3" name="Content Placeholder 2">
-            <a:extLst>
-              <a:ext uri="{FF2B5EF4-FFF2-40B4-BE49-F238E27FC236}">
-                <a16:creationId xmlns:a16="http://schemas.microsoft.com/office/drawing/2014/main" id="{BDFD911A-8902-F101-1D9B-BE1E7163C952}"/>
-              </a:ext>
-            </a:extLst>
-          </p:cNvPr>
-          <p:cNvSpPr>
-            <a:spLocks noGrp="1"/>
-          </p:cNvSpPr>
-          <p:nvPr>
-            <p:ph idx="1"/>
-          </p:nvPr>
-        </p:nvSpPr>
-        <p:spPr/>
-        <p:txBody>
-          <a:bodyPr/>
-          <a:lstStyle/>
-          <a:p>
-            <a:pPr marL="0" indent="0">
-              <a:buNone/>
-            </a:pPr>
-            <a:r>
-              <a:rPr lang="it-IT" noProof="0" dirty="0"/>
-              <a:t>docker exec -it redis-stack redis-cli</a:t>
-            </a:r>
-          </a:p>
-          <a:p>
-            <a:pPr marL="0" indent="0">
-              <a:buNone/>
-            </a:pPr>
-            <a:endParaRPr lang="it-IT" noProof="0" dirty="0"/>
-          </a:p>
-          <a:p>
-            <a:pPr marL="0" indent="0">
-              <a:buNone/>
-            </a:pPr>
-            <a:r>
-              <a:rPr lang="it-IT" noProof="0" dirty="0"/>
-              <a:t>SET nome "Alessandro"</a:t>
-            </a:r>
-            <a:br>
-              <a:rPr lang="it-IT" noProof="0" dirty="0"/>
-            </a:br>
-            <a:r>
-              <a:rPr lang="it-IT" noProof="0" dirty="0"/>
-              <a:t>GET nome</a:t>
-            </a:r>
-          </a:p>
-          <a:p>
-            <a:pPr marL="0" indent="0">
-              <a:buNone/>
-            </a:pPr>
-            <a:endParaRPr lang="it-IT" noProof="0" dirty="0"/>
-          </a:p>
-          <a:p>
-            <a:pPr marL="0" indent="0">
-              <a:buNone/>
-            </a:pPr>
-            <a:r>
-              <a:rPr lang="it-IT" noProof="0" dirty="0">
-                <a:latin typeface="Consolas" panose="020B0609020204030204" pitchFamily="49" charset="0"/>
-              </a:rPr>
-              <a:t>pip install redis</a:t>
-            </a:r>
-          </a:p>
-          <a:p>
-            <a:pPr marL="0" indent="0">
-              <a:buNone/>
-            </a:pPr>
-            <a:r>
-              <a:rPr lang="it-IT" dirty="0">
-                <a:latin typeface="Consolas" panose="020B0609020204030204" pitchFamily="49" charset="0"/>
-              </a:rPr>
-              <a:t>-&gt; redis_test.py</a:t>
-            </a:r>
-            <a:endParaRPr lang="it-IT" noProof="0" dirty="0">
-              <a:latin typeface="Consolas" panose="020B0609020204030204" pitchFamily="49" charset="0"/>
-            </a:endParaRPr>
-          </a:p>
-        </p:txBody>
-      </p:sp>
-    </p:spTree>
-    <p:extLst>
-      <p:ext uri="{BB962C8B-B14F-4D97-AF65-F5344CB8AC3E}">
-        <p14:creationId xmlns:p14="http://schemas.microsoft.com/office/powerpoint/2010/main" val="1136373570"/>
       </p:ext>
     </p:extLst>
   </p:cSld>
